--- a/docs/presentation/Wine_House_Tanitim_PUBLIC.pptx
+++ b/docs/presentation/Wine_House_Tanitim_PUBLIC.pptx
@@ -62,6 +62,7 @@
     <p:sldId id="310" r:id="rId61"/>
     <p:sldId id="311" r:id="rId62"/>
     <p:sldId id="312" r:id="rId63"/>
+    <p:sldId id="313" r:id="rId64"/>
   </p:sldIdLst>
   <p:sldSz cx="12191969" cy="6858000" type="screen4x3"/>
   <p:notesSz cx="6858000" cy="9144000"/>
@@ -5827,7 +5828,7 @@
                 </a:solidFill>
                 <a:latin typeface="DejaVu Sans"/>
               </a:rPr>
-              <a:t>13 / 57</a:t>
+              <a:t>13 / 58</a:t>
             </a:r>
           </a:p>
         </p:txBody>
@@ -13687,7 +13688,7 @@
                 </a:solidFill>
                 <a:latin typeface="DejaVu Sans"/>
               </a:rPr>
-              <a:t>22 / 57</a:t>
+              <a:t>22 / 58</a:t>
             </a:r>
           </a:p>
         </p:txBody>
@@ -18075,7 +18076,7 @@
                 </a:solidFill>
                 <a:latin typeface="DejaVu Sans"/>
               </a:rPr>
-              <a:t>27 / 57</a:t>
+              <a:t>27 / 58</a:t>
             </a:r>
           </a:p>
         </p:txBody>
@@ -22231,7 +22232,7 @@
                 </a:solidFill>
                 <a:latin typeface="DejaVu Sans"/>
               </a:rPr>
-              <a:t>31 / 57</a:t>
+              <a:t>31 / 58</a:t>
             </a:r>
           </a:p>
         </p:txBody>
@@ -24851,7 +24852,7 @@
                 </a:solidFill>
                 <a:latin typeface="DejaVu Sans"/>
               </a:rPr>
-              <a:t>35 / 57</a:t>
+              <a:t>35 / 58</a:t>
             </a:r>
           </a:p>
         </p:txBody>
@@ -31783,7 +31784,7 @@
                 </a:solidFill>
                 <a:latin typeface="DejaVu Sans"/>
               </a:rPr>
-              <a:t>Dürüst durum bildirimi</a:t>
+              <a:t>Platformlar &amp; İndirme</a:t>
             </a:r>
           </a:p>
           <a:p>
@@ -31799,7 +31800,7 @@
                 </a:solidFill>
                 <a:latin typeface="DejaVu Sans"/>
               </a:rPr>
-              <a:t>Tamamlanmamış hiçbir özellik tamamlanmış gibi gösterilmez</a:t>
+              <a:t>Herkese açık GitHub deposu ve hazır paketler</a:t>
             </a:r>
           </a:p>
         </p:txBody>
@@ -31850,388 +31851,14 @@
       </p:sp>
       <p:sp>
         <p:nvSpPr>
-          <p:cNvPr id="4" name="Rounded Rectangle 3"/>
+          <p:cNvPr id="4" name="Rectangle 3"/>
           <p:cNvSpPr/>
           <p:nvPr/>
         </p:nvSpPr>
         <p:spPr>
           <a:xfrm>
-            <a:off x="777240" y="1965960"/>
-            <a:ext cx="4919472" cy="3657600"/>
-          </a:xfrm>
-          <a:prstGeom prst="roundRect">
-            <a:avLst>
-              <a:gd name="adj" fmla="val 6000"/>
-            </a:avLst>
-          </a:prstGeom>
-          <a:solidFill>
-            <a:srgbClr val="241419"/>
-          </a:solidFill>
-          <a:ln w="12700">
-            <a:solidFill>
-              <a:srgbClr val="3D2530"/>
-            </a:solidFill>
-          </a:ln>
-          <a:effectLst/>
-        </p:spPr>
-        <p:style>
-          <a:lnRef idx="1">
-            <a:schemeClr val="accent1"/>
-          </a:lnRef>
-          <a:fillRef idx="3">
-            <a:schemeClr val="accent1"/>
-          </a:fillRef>
-          <a:effectRef idx="2">
-            <a:schemeClr val="accent1"/>
-          </a:effectRef>
-          <a:fontRef idx="minor">
-            <a:schemeClr val="lt1"/>
-          </a:fontRef>
-        </p:style>
-        <p:txBody>
-          <a:bodyPr rtlCol="0" anchor="ctr"/>
-          <a:lstStyle/>
-          <a:p>
-            <a:pPr algn="ctr"/>
-          </a:p>
-        </p:txBody>
-      </p:sp>
-      <p:sp>
-        <p:nvSpPr>
-          <p:cNvPr id="5" name="Rectangle 4"/>
-          <p:cNvSpPr/>
-          <p:nvPr/>
-        </p:nvSpPr>
-        <p:spPr>
-          <a:xfrm>
-            <a:off x="777240" y="1965960"/>
-            <a:ext cx="4919472" cy="50800"/>
-          </a:xfrm>
-          <a:prstGeom prst="rect">
-            <a:avLst/>
-          </a:prstGeom>
-          <a:solidFill>
-            <a:srgbClr val="9B4B6B"/>
-          </a:solidFill>
-          <a:ln>
-            <a:noFill/>
-          </a:ln>
-          <a:effectLst/>
-        </p:spPr>
-        <p:style>
-          <a:lnRef idx="1">
-            <a:schemeClr val="accent1"/>
-          </a:lnRef>
-          <a:fillRef idx="3">
-            <a:schemeClr val="accent1"/>
-          </a:fillRef>
-          <a:effectRef idx="2">
-            <a:schemeClr val="accent1"/>
-          </a:effectRef>
-          <a:fontRef idx="minor">
-            <a:schemeClr val="lt1"/>
-          </a:fontRef>
-        </p:style>
-        <p:txBody>
-          <a:bodyPr rtlCol="0" anchor="ctr"/>
-          <a:lstStyle/>
-          <a:p>
-            <a:pPr algn="ctr"/>
-          </a:p>
-        </p:txBody>
-      </p:sp>
-      <p:sp>
-        <p:nvSpPr>
-          <p:cNvPr id="6" name="TextBox 5"/>
-          <p:cNvSpPr txBox="1"/>
-          <p:nvPr/>
-        </p:nvSpPr>
-        <p:spPr>
-          <a:xfrm>
-            <a:off x="1051560" y="2212848"/>
-            <a:ext cx="4389120" cy="457200"/>
-          </a:xfrm>
-          <a:prstGeom prst="rect">
-            <a:avLst/>
-          </a:prstGeom>
-          <a:noFill/>
-        </p:spPr>
-        <p:txBody>
-          <a:bodyPr wrap="square" anchor="t" lIns="0" rIns="0" tIns="0" bIns="0">
-            <a:spAutoFit/>
-          </a:bodyPr>
-          <a:lstStyle/>
-          <a:p>
-            <a:pPr algn="l">
-              <a:spcAft>
-                <a:spcPts val="0"/>
-              </a:spcAft>
-            </a:pPr>
-            <a:r>
-              <a:rPr sz="1500" b="1">
-                <a:solidFill>
-                  <a:srgbClr val="C8A45C"/>
-                </a:solidFill>
-                <a:latin typeface="DejaVu Sans"/>
-              </a:rPr>
-              <a:t>Hazır ve çalışıyor</a:t>
-            </a:r>
-          </a:p>
-        </p:txBody>
-      </p:sp>
-      <p:sp>
-        <p:nvSpPr>
-          <p:cNvPr id="7" name="TextBox 6"/>
-          <p:cNvSpPr txBox="1"/>
-          <p:nvPr/>
-        </p:nvSpPr>
-        <p:spPr>
-          <a:xfrm>
-            <a:off x="1051560" y="2761488"/>
-            <a:ext cx="4434840" cy="566928"/>
-          </a:xfrm>
-          <a:prstGeom prst="rect">
-            <a:avLst/>
-          </a:prstGeom>
-          <a:noFill/>
-        </p:spPr>
-        <p:txBody>
-          <a:bodyPr wrap="square" anchor="t" lIns="0" rIns="0" tIns="0" bIns="0">
-            <a:spAutoFit/>
-          </a:bodyPr>
-          <a:lstStyle/>
-          <a:p>
-            <a:pPr algn="l">
-              <a:spcAft>
-                <a:spcPts val="0"/>
-              </a:spcAft>
-            </a:pPr>
-            <a:r>
-              <a:rPr sz="1250" b="0">
-                <a:solidFill>
-                  <a:srgbClr val="F2EAEC"/>
-                </a:solidFill>
-                <a:latin typeface="DejaVu Sans"/>
-              </a:rPr>
-              <a:t>·  Salon operasyonu · KDS · ödeme · gün sonu</a:t>
-            </a:r>
-          </a:p>
-        </p:txBody>
-      </p:sp>
-      <p:sp>
-        <p:nvSpPr>
-          <p:cNvPr id="8" name="TextBox 7"/>
-          <p:cNvSpPr txBox="1"/>
-          <p:nvPr/>
-        </p:nvSpPr>
-        <p:spPr>
-          <a:xfrm>
-            <a:off x="1051560" y="3328416"/>
-            <a:ext cx="4434840" cy="566928"/>
-          </a:xfrm>
-          <a:prstGeom prst="rect">
-            <a:avLst/>
-          </a:prstGeom>
-          <a:noFill/>
-        </p:spPr>
-        <p:txBody>
-          <a:bodyPr wrap="square" anchor="t" lIns="0" rIns="0" tIns="0" bIns="0">
-            <a:spAutoFit/>
-          </a:bodyPr>
-          <a:lstStyle/>
-          <a:p>
-            <a:pPr algn="l">
-              <a:spcAft>
-                <a:spcPts val="0"/>
-              </a:spcAft>
-            </a:pPr>
-            <a:r>
-              <a:rPr sz="1250" b="0">
-                <a:solidFill>
-                  <a:srgbClr val="F2EAEC"/>
-                </a:solidFill>
-                <a:latin typeface="DejaVu Sans"/>
-              </a:rPr>
-              <a:t>·  Şarap kavı · kadeh servisi · verim analizi</a:t>
-            </a:r>
-          </a:p>
-        </p:txBody>
-      </p:sp>
-      <p:sp>
-        <p:nvSpPr>
-          <p:cNvPr id="9" name="TextBox 8"/>
-          <p:cNvSpPr txBox="1"/>
-          <p:nvPr/>
-        </p:nvSpPr>
-        <p:spPr>
-          <a:xfrm>
-            <a:off x="1051560" y="3895344"/>
-            <a:ext cx="4434840" cy="566928"/>
-          </a:xfrm>
-          <a:prstGeom prst="rect">
-            <a:avLst/>
-          </a:prstGeom>
-          <a:noFill/>
-        </p:spPr>
-        <p:txBody>
-          <a:bodyPr wrap="square" anchor="t" lIns="0" rIns="0" tIns="0" bIns="0">
-            <a:spAutoFit/>
-          </a:bodyPr>
-          <a:lstStyle/>
-          <a:p>
-            <a:pPr algn="l">
-              <a:spcAft>
-                <a:spcPts val="0"/>
-              </a:spcAft>
-            </a:pPr>
-            <a:r>
-              <a:rPr sz="1250" b="0">
-                <a:solidFill>
-                  <a:srgbClr val="F2EAEC"/>
-                </a:solidFill>
-                <a:latin typeface="DejaVu Sans"/>
-              </a:rPr>
-              <a:t>·  Stok · satın alma · fire · sayım</a:t>
-            </a:r>
-          </a:p>
-        </p:txBody>
-      </p:sp>
-      <p:sp>
-        <p:nvSpPr>
-          <p:cNvPr id="10" name="TextBox 9"/>
-          <p:cNvSpPr txBox="1"/>
-          <p:nvPr/>
-        </p:nvSpPr>
-        <p:spPr>
-          <a:xfrm>
-            <a:off x="1051560" y="4462272"/>
-            <a:ext cx="4434840" cy="566928"/>
-          </a:xfrm>
-          <a:prstGeom prst="rect">
-            <a:avLst/>
-          </a:prstGeom>
-          <a:noFill/>
-        </p:spPr>
-        <p:txBody>
-          <a:bodyPr wrap="square" anchor="t" lIns="0" rIns="0" tIns="0" bIns="0">
-            <a:spAutoFit/>
-          </a:bodyPr>
-          <a:lstStyle/>
-          <a:p>
-            <a:pPr algn="l">
-              <a:spcAft>
-                <a:spcPts val="0"/>
-              </a:spcAft>
-            </a:pPr>
-            <a:r>
-              <a:rPr sz="1250" b="0">
-                <a:solidFill>
-                  <a:srgbClr val="F2EAEC"/>
-                </a:solidFill>
-                <a:latin typeface="DejaVu Sans"/>
-              </a:rPr>
-              <a:t>·  CRM · KVKK · personel · 13 rapor</a:t>
-            </a:r>
-          </a:p>
-        </p:txBody>
-      </p:sp>
-      <p:sp>
-        <p:nvSpPr>
-          <p:cNvPr id="11" name="TextBox 10"/>
-          <p:cNvSpPr txBox="1"/>
-          <p:nvPr/>
-        </p:nvSpPr>
-        <p:spPr>
-          <a:xfrm>
-            <a:off x="1051560" y="5029200"/>
-            <a:ext cx="4434840" cy="566928"/>
-          </a:xfrm>
-          <a:prstGeom prst="rect">
-            <a:avLst/>
-          </a:prstGeom>
-          <a:noFill/>
-        </p:spPr>
-        <p:txBody>
-          <a:bodyPr wrap="square" anchor="t" lIns="0" rIns="0" tIns="0" bIns="0">
-            <a:spAutoFit/>
-          </a:bodyPr>
-          <a:lstStyle/>
-          <a:p>
-            <a:pPr algn="l">
-              <a:spcAft>
-                <a:spcPts val="0"/>
-              </a:spcAft>
-            </a:pPr>
-            <a:r>
-              <a:rPr sz="1250" b="0">
-                <a:solidFill>
-                  <a:srgbClr val="F2EAEC"/>
-                </a:solidFill>
-                <a:latin typeface="DejaVu Sans"/>
-              </a:rPr>
-              <a:t>·  Yapay zekâ katmanı · yedekleme · 19 rol</a:t>
-            </a:r>
-          </a:p>
-        </p:txBody>
-      </p:sp>
-      <p:sp>
-        <p:nvSpPr>
-          <p:cNvPr id="12" name="Rounded Rectangle 11"/>
-          <p:cNvSpPr/>
-          <p:nvPr/>
-        </p:nvSpPr>
-        <p:spPr>
-          <a:xfrm>
-            <a:off x="6492240" y="1965960"/>
-            <a:ext cx="4919472" cy="3657600"/>
-          </a:xfrm>
-          <a:prstGeom prst="roundRect">
-            <a:avLst>
-              <a:gd name="adj" fmla="val 6000"/>
-            </a:avLst>
-          </a:prstGeom>
-          <a:solidFill>
-            <a:srgbClr val="241419"/>
-          </a:solidFill>
-          <a:ln w="12700">
-            <a:solidFill>
-              <a:srgbClr val="3D2530"/>
-            </a:solidFill>
-          </a:ln>
-          <a:effectLst/>
-        </p:spPr>
-        <p:style>
-          <a:lnRef idx="1">
-            <a:schemeClr val="accent1"/>
-          </a:lnRef>
-          <a:fillRef idx="3">
-            <a:schemeClr val="accent1"/>
-          </a:fillRef>
-          <a:effectRef idx="2">
-            <a:schemeClr val="accent1"/>
-          </a:effectRef>
-          <a:fontRef idx="minor">
-            <a:schemeClr val="lt1"/>
-          </a:fontRef>
-        </p:style>
-        <p:txBody>
-          <a:bodyPr rtlCol="0" anchor="ctr"/>
-          <a:lstStyle/>
-          <a:p>
-            <a:pPr algn="ctr"/>
-          </a:p>
-        </p:txBody>
-      </p:sp>
-      <p:sp>
-        <p:nvSpPr>
-          <p:cNvPr id="13" name="Rectangle 12"/>
-          <p:cNvSpPr/>
-          <p:nvPr/>
-        </p:nvSpPr>
-        <p:spPr>
-          <a:xfrm>
-            <a:off x="6492240" y="1965960"/>
-            <a:ext cx="4919472" cy="50800"/>
+            <a:off x="822960" y="2150303"/>
+            <a:ext cx="76200" cy="76200"/>
           </a:xfrm>
           <a:prstGeom prst="rect">
             <a:avLst/>
@@ -32268,280 +31895,284 @@
       </p:sp>
       <p:sp>
         <p:nvSpPr>
-          <p:cNvPr id="14" name="TextBox 13"/>
-          <p:cNvSpPr txBox="1"/>
-          <p:nvPr/>
-        </p:nvSpPr>
-        <p:spPr>
-          <a:xfrm>
-            <a:off x="6766559" y="2212848"/>
-            <a:ext cx="4389120" cy="457200"/>
-          </a:xfrm>
-          <a:prstGeom prst="rect">
-            <a:avLst/>
-          </a:prstGeom>
-          <a:noFill/>
-        </p:spPr>
-        <p:txBody>
-          <a:bodyPr wrap="square" anchor="t" lIns="0" rIns="0" tIns="0" bIns="0">
-            <a:spAutoFit/>
-          </a:bodyPr>
-          <a:lstStyle/>
-          <a:p>
-            <a:pPr algn="l">
-              <a:spcAft>
-                <a:spcPts val="0"/>
-              </a:spcAft>
-            </a:pPr>
-            <a:r>
-              <a:rPr sz="1500" b="1">
+          <p:cNvPr id="5" name="TextBox 4"/>
+          <p:cNvSpPr txBox="1"/>
+          <p:nvPr/>
+        </p:nvSpPr>
+        <p:spPr>
+          <a:xfrm>
+            <a:off x="1170432" y="1965960"/>
+            <a:ext cx="10241280" cy="658368"/>
+          </a:xfrm>
+          <a:prstGeom prst="rect">
+            <a:avLst/>
+          </a:prstGeom>
+          <a:noFill/>
+        </p:spPr>
+        <p:txBody>
+          <a:bodyPr wrap="square" anchor="t" lIns="0" rIns="0" tIns="0" bIns="0">
+            <a:spAutoFit/>
+          </a:bodyPr>
+          <a:lstStyle/>
+          <a:p>
+            <a:pPr algn="l">
+              <a:spcAft>
+                <a:spcPts val="0"/>
+              </a:spcAft>
+            </a:pPr>
+            <a:r>
+              <a:rPr sz="1600" b="1">
                 <a:solidFill>
                   <a:srgbClr val="C8A45C"/>
                 </a:solidFill>
                 <a:latin typeface="DejaVu Sans"/>
               </a:rPr>
-              <a:t>Deneysel veya planlandı</a:t>
-            </a:r>
-          </a:p>
-        </p:txBody>
-      </p:sp>
-      <p:sp>
-        <p:nvSpPr>
-          <p:cNvPr id="15" name="TextBox 14"/>
-          <p:cNvSpPr txBox="1"/>
-          <p:nvPr/>
-        </p:nvSpPr>
-        <p:spPr>
-          <a:xfrm>
-            <a:off x="6766559" y="2761488"/>
-            <a:ext cx="4434840" cy="566928"/>
-          </a:xfrm>
-          <a:prstGeom prst="rect">
-            <a:avLst/>
-          </a:prstGeom>
-          <a:noFill/>
-        </p:spPr>
-        <p:txBody>
-          <a:bodyPr wrap="square" anchor="t" lIns="0" rIns="0" tIns="0" bIns="0">
-            <a:spAutoFit/>
-          </a:bodyPr>
-          <a:lstStyle/>
-          <a:p>
-            <a:pPr algn="l">
-              <a:spcAft>
-                <a:spcPts val="0"/>
-              </a:spcAft>
-            </a:pPr>
-            <a:r>
-              <a:rPr sz="1250" b="0">
+              <a:t>Windows 10/11 (x64)</a:t>
+            </a:r>
+            <a:r>
+              <a:rPr sz="1600" b="0">
                 <a:solidFill>
                   <a:srgbClr val="F2EAEC"/>
                 </a:solidFill>
                 <a:latin typeface="DejaVu Sans"/>
               </a:rPr>
-              <a:t>·  Canlı ödeme ve e-Fatura (yalnızca adaptör)</a:t>
-            </a:r>
-          </a:p>
-        </p:txBody>
-      </p:sp>
-      <p:sp>
-        <p:nvSpPr>
-          <p:cNvPr id="16" name="TextBox 15"/>
-          <p:cNvSpPr txBox="1"/>
-          <p:nvPr/>
-        </p:nvSpPr>
-        <p:spPr>
-          <a:xfrm>
-            <a:off x="6766559" y="3328416"/>
-            <a:ext cx="4434840" cy="566928"/>
-          </a:xfrm>
-          <a:prstGeom prst="rect">
-            <a:avLst/>
-          </a:prstGeom>
-          <a:noFill/>
-        </p:spPr>
-        <p:txBody>
-          <a:bodyPr wrap="square" anchor="t" lIns="0" rIns="0" tIns="0" bIns="0">
-            <a:spAutoFit/>
-          </a:bodyPr>
-          <a:lstStyle/>
-          <a:p>
-            <a:pPr algn="l">
-              <a:spcAft>
-                <a:spcPts val="0"/>
-              </a:spcAft>
-            </a:pPr>
-            <a:r>
-              <a:rPr sz="1250" b="0">
+              <a:t> + </a:t>
+            </a:r>
+            <a:r>
+              <a:rPr sz="1600" b="1">
+                <a:solidFill>
+                  <a:srgbClr val="C8A45C"/>
+                </a:solidFill>
+                <a:latin typeface="DejaVu Sans"/>
+              </a:rPr>
+              <a:t>macOS (Apple Silicon)</a:t>
+            </a:r>
+            <a:r>
+              <a:rPr sz="1600" b="0">
                 <a:solidFill>
                   <a:srgbClr val="F2EAEC"/>
                 </a:solidFill>
                 <a:latin typeface="DejaVu Sans"/>
               </a:rPr>
-              <a:t>·  Termal yazıcı sürücüsü</a:t>
-            </a:r>
-          </a:p>
-        </p:txBody>
-      </p:sp>
-      <p:sp>
-        <p:nvSpPr>
-          <p:cNvPr id="17" name="TextBox 16"/>
-          <p:cNvSpPr txBox="1"/>
-          <p:nvPr/>
-        </p:nvSpPr>
-        <p:spPr>
-          <a:xfrm>
-            <a:off x="6766559" y="3895344"/>
-            <a:ext cx="4434840" cy="566928"/>
-          </a:xfrm>
-          <a:prstGeom prst="rect">
-            <a:avLst/>
-          </a:prstGeom>
-          <a:noFill/>
-        </p:spPr>
-        <p:txBody>
-          <a:bodyPr wrap="square" anchor="t" lIns="0" rIns="0" tIns="0" bIns="0">
-            <a:spAutoFit/>
-          </a:bodyPr>
-          <a:lstStyle/>
-          <a:p>
-            <a:pPr algn="l">
-              <a:spcAft>
-                <a:spcPts val="0"/>
-              </a:spcAft>
-            </a:pPr>
-            <a:r>
-              <a:rPr sz="1250" b="0">
+              <a:t> — İndirme: github.com/Azizsekerdil/smart-wine-restaurant-management-system/releases (v0.1.0)</a:t>
+            </a:r>
+          </a:p>
+        </p:txBody>
+      </p:sp>
+      <p:sp>
+        <p:nvSpPr>
+          <p:cNvPr id="6" name="Rectangle 5"/>
+          <p:cNvSpPr/>
+          <p:nvPr/>
+        </p:nvSpPr>
+        <p:spPr>
+          <a:xfrm>
+            <a:off x="822960" y="2808671"/>
+            <a:ext cx="76200" cy="76200"/>
+          </a:xfrm>
+          <a:prstGeom prst="rect">
+            <a:avLst/>
+          </a:prstGeom>
+          <a:solidFill>
+            <a:srgbClr val="C8A45C"/>
+          </a:solidFill>
+          <a:ln>
+            <a:noFill/>
+          </a:ln>
+          <a:effectLst/>
+        </p:spPr>
+        <p:style>
+          <a:lnRef idx="1">
+            <a:schemeClr val="accent1"/>
+          </a:lnRef>
+          <a:fillRef idx="3">
+            <a:schemeClr val="accent1"/>
+          </a:fillRef>
+          <a:effectRef idx="2">
+            <a:schemeClr val="accent1"/>
+          </a:effectRef>
+          <a:fontRef idx="minor">
+            <a:schemeClr val="lt1"/>
+          </a:fontRef>
+        </p:style>
+        <p:txBody>
+          <a:bodyPr rtlCol="0" anchor="ctr"/>
+          <a:lstStyle/>
+          <a:p>
+            <a:pPr algn="ctr"/>
+          </a:p>
+        </p:txBody>
+      </p:sp>
+      <p:sp>
+        <p:nvSpPr>
+          <p:cNvPr id="7" name="TextBox 6"/>
+          <p:cNvSpPr txBox="1"/>
+          <p:nvPr/>
+        </p:nvSpPr>
+        <p:spPr>
+          <a:xfrm>
+            <a:off x="1170432" y="2624328"/>
+            <a:ext cx="10241280" cy="658368"/>
+          </a:xfrm>
+          <a:prstGeom prst="rect">
+            <a:avLst/>
+          </a:prstGeom>
+          <a:noFill/>
+        </p:spPr>
+        <p:txBody>
+          <a:bodyPr wrap="square" anchor="t" lIns="0" rIns="0" tIns="0" bIns="0">
+            <a:spAutoFit/>
+          </a:bodyPr>
+          <a:lstStyle/>
+          <a:p>
+            <a:pPr algn="l">
+              <a:spcAft>
+                <a:spcPts val="0"/>
+              </a:spcAft>
+            </a:pPr>
+            <a:r>
+              <a:rPr sz="1600" b="0">
                 <a:solidFill>
                   <a:srgbClr val="F2EAEC"/>
                 </a:solidFill>
                 <a:latin typeface="DejaVu Sans"/>
               </a:rPr>
-              <a:t>·  Toplu e-posta/SMS gönderimi</a:t>
-            </a:r>
-          </a:p>
-        </p:txBody>
-      </p:sp>
-      <p:sp>
-        <p:nvSpPr>
-          <p:cNvPr id="18" name="TextBox 17"/>
-          <p:cNvSpPr txBox="1"/>
-          <p:nvPr/>
-        </p:nvSpPr>
-        <p:spPr>
-          <a:xfrm>
-            <a:off x="6766559" y="4462272"/>
-            <a:ext cx="4434840" cy="566928"/>
-          </a:xfrm>
-          <a:prstGeom prst="rect">
-            <a:avLst/>
-          </a:prstGeom>
-          <a:noFill/>
-        </p:spPr>
-        <p:txBody>
-          <a:bodyPr wrap="square" anchor="t" lIns="0" rIns="0" tIns="0" bIns="0">
-            <a:spAutoFit/>
-          </a:bodyPr>
-          <a:lstStyle/>
-          <a:p>
-            <a:pPr algn="l">
-              <a:spcAft>
-                <a:spcPts val="0"/>
-              </a:spcAft>
-            </a:pPr>
-            <a:r>
-              <a:rPr sz="1250" b="0">
+              <a:t>GitHub deposu </a:t>
+            </a:r>
+            <a:r>
+              <a:rPr sz="1600" b="1">
+                <a:solidFill>
+                  <a:srgbClr val="C8A45C"/>
+                </a:solidFill>
+                <a:latin typeface="DejaVu Sans"/>
+              </a:rPr>
+              <a:t>herkese açık</a:t>
+            </a:r>
+            <a:r>
+              <a:rPr sz="1600" b="0">
                 <a:solidFill>
                   <a:srgbClr val="F2EAEC"/>
                 </a:solidFill>
                 <a:latin typeface="DejaVu Sans"/>
               </a:rPr>
-              <a:t>·  Kav sensör entegrasyonu</a:t>
-            </a:r>
-          </a:p>
-        </p:txBody>
-      </p:sp>
-      <p:sp>
-        <p:nvSpPr>
-          <p:cNvPr id="19" name="TextBox 18"/>
-          <p:cNvSpPr txBox="1"/>
-          <p:nvPr/>
-        </p:nvSpPr>
-        <p:spPr>
-          <a:xfrm>
-            <a:off x="6766559" y="5029200"/>
-            <a:ext cx="4434840" cy="566928"/>
-          </a:xfrm>
-          <a:prstGeom prst="rect">
-            <a:avLst/>
-          </a:prstGeom>
-          <a:noFill/>
-        </p:spPr>
-        <p:txBody>
-          <a:bodyPr wrap="square" anchor="t" lIns="0" rIns="0" tIns="0" bIns="0">
-            <a:spAutoFit/>
-          </a:bodyPr>
-          <a:lstStyle/>
-          <a:p>
-            <a:pPr algn="l">
-              <a:spcAft>
-                <a:spcPts val="0"/>
-              </a:spcAft>
-            </a:pPr>
-            <a:r>
-              <a:rPr sz="1250" b="0">
+              <a:t>: github.com/Azizsekerdil/smart-wine-restaurant-management-system</a:t>
+            </a:r>
+          </a:p>
+        </p:txBody>
+      </p:sp>
+      <p:sp>
+        <p:nvSpPr>
+          <p:cNvPr id="8" name="Rectangle 7"/>
+          <p:cNvSpPr/>
+          <p:nvPr/>
+        </p:nvSpPr>
+        <p:spPr>
+          <a:xfrm>
+            <a:off x="822960" y="3467039"/>
+            <a:ext cx="76200" cy="76200"/>
+          </a:xfrm>
+          <a:prstGeom prst="rect">
+            <a:avLst/>
+          </a:prstGeom>
+          <a:solidFill>
+            <a:srgbClr val="C8A45C"/>
+          </a:solidFill>
+          <a:ln>
+            <a:noFill/>
+          </a:ln>
+          <a:effectLst/>
+        </p:spPr>
+        <p:style>
+          <a:lnRef idx="1">
+            <a:schemeClr val="accent1"/>
+          </a:lnRef>
+          <a:fillRef idx="3">
+            <a:schemeClr val="accent1"/>
+          </a:fillRef>
+          <a:effectRef idx="2">
+            <a:schemeClr val="accent1"/>
+          </a:effectRef>
+          <a:fontRef idx="minor">
+            <a:schemeClr val="lt1"/>
+          </a:fontRef>
+        </p:style>
+        <p:txBody>
+          <a:bodyPr rtlCol="0" anchor="ctr"/>
+          <a:lstStyle/>
+          <a:p>
+            <a:pPr algn="ctr"/>
+          </a:p>
+        </p:txBody>
+      </p:sp>
+      <p:sp>
+        <p:nvSpPr>
+          <p:cNvPr id="9" name="TextBox 8"/>
+          <p:cNvSpPr txBox="1"/>
+          <p:nvPr/>
+        </p:nvSpPr>
+        <p:spPr>
+          <a:xfrm>
+            <a:off x="1170432" y="3282696"/>
+            <a:ext cx="10241280" cy="658368"/>
+          </a:xfrm>
+          <a:prstGeom prst="rect">
+            <a:avLst/>
+          </a:prstGeom>
+          <a:noFill/>
+        </p:spPr>
+        <p:txBody>
+          <a:bodyPr wrap="square" anchor="t" lIns="0" rIns="0" tIns="0" bIns="0">
+            <a:spAutoFit/>
+          </a:bodyPr>
+          <a:lstStyle/>
+          <a:p>
+            <a:pPr algn="l">
+              <a:spcAft>
+                <a:spcPts val="0"/>
+              </a:spcAft>
+            </a:pPr>
+            <a:r>
+              <a:rPr sz="1600" b="0">
                 <a:solidFill>
                   <a:srgbClr val="F2EAEC"/>
                 </a:solidFill>
                 <a:latin typeface="DejaVu Sans"/>
               </a:rPr>
-              <a:t>·  Etiket görsel analizi · çok terminalli senkronizasyon</a:t>
-            </a:r>
-          </a:p>
-        </p:txBody>
-      </p:sp>
-      <p:sp>
-        <p:nvSpPr>
-          <p:cNvPr id="20" name="TextBox 19"/>
-          <p:cNvSpPr txBox="1"/>
-          <p:nvPr/>
-        </p:nvSpPr>
-        <p:spPr>
-          <a:xfrm>
-            <a:off x="777240" y="5779008"/>
-            <a:ext cx="10607040" cy="457200"/>
-          </a:xfrm>
-          <a:prstGeom prst="rect">
-            <a:avLst/>
-          </a:prstGeom>
-          <a:noFill/>
-        </p:spPr>
-        <p:txBody>
-          <a:bodyPr wrap="square" anchor="t" lIns="0" rIns="0" tIns="0" bIns="0">
-            <a:spAutoFit/>
-          </a:bodyPr>
-          <a:lstStyle/>
-          <a:p>
-            <a:pPr algn="l">
-              <a:spcAft>
-                <a:spcPts val="0"/>
-              </a:spcAft>
-            </a:pPr>
-            <a:r>
-              <a:rPr sz="1100" b="0">
-                <a:solidFill>
-                  <a:srgbClr val="B9A7AE"/>
-                </a:solidFill>
-                <a:latin typeface="DejaVu Sans"/>
-              </a:rPr>
-              <a:t>Her özellik uygulamada rozetle işaretlenir: Hazır · Deneysel · Planlandı</a:t>
-            </a:r>
-          </a:p>
-        </p:txBody>
-      </p:sp>
-      <p:sp>
-        <p:nvSpPr>
-          <p:cNvPr id="21" name="TextBox 20"/>
+              <a:t>v0.1.0 sürümü iki paketle yayında: </a:t>
+            </a:r>
+            <a:r>
+              <a:rPr sz="1600" b="1">
+                <a:solidFill>
+                  <a:srgbClr val="C8A45C"/>
+                </a:solidFill>
+                <a:latin typeface="DejaVu Sans"/>
+              </a:rPr>
+              <a:t>Windows ZIP</a:t>
+            </a:r>
+            <a:r>
+              <a:rPr sz="1600" b="0">
+                <a:solidFill>
+                  <a:srgbClr val="F2EAEC"/>
+                </a:solidFill>
+                <a:latin typeface="DejaVu Sans"/>
+              </a:rPr>
+              <a:t> + </a:t>
+            </a:r>
+            <a:r>
+              <a:rPr sz="1600" b="1">
+                <a:solidFill>
+                  <a:srgbClr val="C8A45C"/>
+                </a:solidFill>
+                <a:latin typeface="DejaVu Sans"/>
+              </a:rPr>
+              <a:t>macOS ZIP</a:t>
+            </a:r>
+          </a:p>
+        </p:txBody>
+      </p:sp>
+      <p:sp>
+        <p:nvSpPr>
+          <p:cNvPr id="10" name="TextBox 9"/>
           <p:cNvSpPr txBox="1"/>
           <p:nvPr/>
         </p:nvSpPr>
@@ -32580,7 +32211,7 @@
       </p:sp>
       <p:sp>
         <p:nvSpPr>
-          <p:cNvPr id="22" name="TextBox 21"/>
+          <p:cNvPr id="11" name="TextBox 10"/>
           <p:cNvSpPr txBox="1"/>
           <p:nvPr/>
         </p:nvSpPr>
@@ -32645,45 +32276,56 @@
       <p:grpSpPr/>
       <p:sp>
         <p:nvSpPr>
-          <p:cNvPr id="2" name="Rectangle 1"/>
-          <p:cNvSpPr/>
-          <p:nvPr/>
-        </p:nvSpPr>
-        <p:spPr>
-          <a:xfrm>
-            <a:off x="0" y="2514600"/>
-            <a:ext cx="12191969" cy="1828800"/>
-          </a:xfrm>
-          <a:prstGeom prst="rect">
-            <a:avLst/>
-          </a:prstGeom>
-          <a:solidFill>
-            <a:srgbClr val="241419"/>
-          </a:solidFill>
-          <a:ln>
-            <a:noFill/>
-          </a:ln>
-          <a:effectLst/>
-        </p:spPr>
-        <p:style>
-          <a:lnRef idx="1">
-            <a:schemeClr val="accent1"/>
-          </a:lnRef>
-          <a:fillRef idx="3">
-            <a:schemeClr val="accent1"/>
-          </a:fillRef>
-          <a:effectRef idx="2">
-            <a:schemeClr val="accent1"/>
-          </a:effectRef>
-          <a:fontRef idx="minor">
-            <a:schemeClr val="lt1"/>
-          </a:fontRef>
-        </p:style>
-        <p:txBody>
-          <a:bodyPr rtlCol="0" anchor="ctr"/>
-          <a:lstStyle/>
-          <a:p>
-            <a:pPr algn="ctr"/>
+          <p:cNvPr id="2" name="TextBox 1"/>
+          <p:cNvSpPr txBox="1"/>
+          <p:nvPr/>
+        </p:nvSpPr>
+        <p:spPr>
+          <a:xfrm>
+            <a:off x="777240" y="566928"/>
+            <a:ext cx="10607040" cy="914400"/>
+          </a:xfrm>
+          <a:prstGeom prst="rect">
+            <a:avLst/>
+          </a:prstGeom>
+          <a:noFill/>
+        </p:spPr>
+        <p:txBody>
+          <a:bodyPr wrap="square" anchor="t" lIns="0" rIns="0" tIns="0" bIns="0">
+            <a:spAutoFit/>
+          </a:bodyPr>
+          <a:lstStyle/>
+          <a:p>
+            <a:pPr algn="l">
+              <a:spcAft>
+                <a:spcPts val="0"/>
+              </a:spcAft>
+            </a:pPr>
+            <a:r>
+              <a:rPr sz="3000" b="1">
+                <a:solidFill>
+                  <a:srgbClr val="F2EAEC"/>
+                </a:solidFill>
+                <a:latin typeface="DejaVu Sans"/>
+              </a:rPr>
+              <a:t>Dürüst durum bildirimi</a:t>
+            </a:r>
+          </a:p>
+          <a:p>
+            <a:pPr algn="l">
+              <a:spcAft>
+                <a:spcPts val="0"/>
+              </a:spcAft>
+            </a:pPr>
+            <a:r>
+              <a:rPr sz="1400" b="0">
+                <a:solidFill>
+                  <a:srgbClr val="B9A7AE"/>
+                </a:solidFill>
+                <a:latin typeface="DejaVu Sans"/>
+              </a:rPr>
+              <a:t>Tamamlanmamış hiçbir özellik tamamlanmış gibi gösterilmez</a:t>
+            </a:r>
           </a:p>
         </p:txBody>
       </p:sp>
@@ -32695,8 +32337,8 @@
         </p:nvSpPr>
         <p:spPr>
           <a:xfrm>
-            <a:off x="777240" y="2514600"/>
-            <a:ext cx="63500" cy="1828800"/>
+            <a:off x="777240" y="1572768"/>
+            <a:ext cx="1371600" cy="38100"/>
           </a:xfrm>
           <a:prstGeom prst="rect">
             <a:avLst/>
@@ -32733,92 +32375,666 @@
       </p:sp>
       <p:sp>
         <p:nvSpPr>
-          <p:cNvPr id="4" name="TextBox 3"/>
-          <p:cNvSpPr txBox="1"/>
-          <p:nvPr/>
-        </p:nvSpPr>
-        <p:spPr>
-          <a:xfrm>
-            <a:off x="1188720" y="2834640"/>
-            <a:ext cx="9601200" cy="822960"/>
-          </a:xfrm>
-          <a:prstGeom prst="rect">
-            <a:avLst/>
-          </a:prstGeom>
-          <a:noFill/>
-        </p:spPr>
-        <p:txBody>
-          <a:bodyPr wrap="square" anchor="t" lIns="0" rIns="0" tIns="0" bIns="0">
-            <a:spAutoFit/>
-          </a:bodyPr>
-          <a:lstStyle/>
-          <a:p>
-            <a:pPr algn="l">
-              <a:spcAft>
-                <a:spcPts val="0"/>
-              </a:spcAft>
-            </a:pPr>
-            <a:r>
-              <a:rPr sz="4000" b="1">
+          <p:cNvPr id="4" name="Rounded Rectangle 3"/>
+          <p:cNvSpPr/>
+          <p:nvPr/>
+        </p:nvSpPr>
+        <p:spPr>
+          <a:xfrm>
+            <a:off x="777240" y="1965960"/>
+            <a:ext cx="4919472" cy="3657600"/>
+          </a:xfrm>
+          <a:prstGeom prst="roundRect">
+            <a:avLst>
+              <a:gd name="adj" fmla="val 6000"/>
+            </a:avLst>
+          </a:prstGeom>
+          <a:solidFill>
+            <a:srgbClr val="241419"/>
+          </a:solidFill>
+          <a:ln w="12700">
+            <a:solidFill>
+              <a:srgbClr val="3D2530"/>
+            </a:solidFill>
+          </a:ln>
+          <a:effectLst/>
+        </p:spPr>
+        <p:style>
+          <a:lnRef idx="1">
+            <a:schemeClr val="accent1"/>
+          </a:lnRef>
+          <a:fillRef idx="3">
+            <a:schemeClr val="accent1"/>
+          </a:fillRef>
+          <a:effectRef idx="2">
+            <a:schemeClr val="accent1"/>
+          </a:effectRef>
+          <a:fontRef idx="minor">
+            <a:schemeClr val="lt1"/>
+          </a:fontRef>
+        </p:style>
+        <p:txBody>
+          <a:bodyPr rtlCol="0" anchor="ctr"/>
+          <a:lstStyle/>
+          <a:p>
+            <a:pPr algn="ctr"/>
+          </a:p>
+        </p:txBody>
+      </p:sp>
+      <p:sp>
+        <p:nvSpPr>
+          <p:cNvPr id="5" name="Rectangle 4"/>
+          <p:cNvSpPr/>
+          <p:nvPr/>
+        </p:nvSpPr>
+        <p:spPr>
+          <a:xfrm>
+            <a:off x="777240" y="1965960"/>
+            <a:ext cx="4919472" cy="50800"/>
+          </a:xfrm>
+          <a:prstGeom prst="rect">
+            <a:avLst/>
+          </a:prstGeom>
+          <a:solidFill>
+            <a:srgbClr val="9B4B6B"/>
+          </a:solidFill>
+          <a:ln>
+            <a:noFill/>
+          </a:ln>
+          <a:effectLst/>
+        </p:spPr>
+        <p:style>
+          <a:lnRef idx="1">
+            <a:schemeClr val="accent1"/>
+          </a:lnRef>
+          <a:fillRef idx="3">
+            <a:schemeClr val="accent1"/>
+          </a:fillRef>
+          <a:effectRef idx="2">
+            <a:schemeClr val="accent1"/>
+          </a:effectRef>
+          <a:fontRef idx="minor">
+            <a:schemeClr val="lt1"/>
+          </a:fontRef>
+        </p:style>
+        <p:txBody>
+          <a:bodyPr rtlCol="0" anchor="ctr"/>
+          <a:lstStyle/>
+          <a:p>
+            <a:pPr algn="ctr"/>
+          </a:p>
+        </p:txBody>
+      </p:sp>
+      <p:sp>
+        <p:nvSpPr>
+          <p:cNvPr id="6" name="TextBox 5"/>
+          <p:cNvSpPr txBox="1"/>
+          <p:nvPr/>
+        </p:nvSpPr>
+        <p:spPr>
+          <a:xfrm>
+            <a:off x="1051560" y="2212848"/>
+            <a:ext cx="4389120" cy="457200"/>
+          </a:xfrm>
+          <a:prstGeom prst="rect">
+            <a:avLst/>
+          </a:prstGeom>
+          <a:noFill/>
+        </p:spPr>
+        <p:txBody>
+          <a:bodyPr wrap="square" anchor="t" lIns="0" rIns="0" tIns="0" bIns="0">
+            <a:spAutoFit/>
+          </a:bodyPr>
+          <a:lstStyle/>
+          <a:p>
+            <a:pPr algn="l">
+              <a:spcAft>
+                <a:spcPts val="0"/>
+              </a:spcAft>
+            </a:pPr>
+            <a:r>
+              <a:rPr sz="1500" b="1">
+                <a:solidFill>
+                  <a:srgbClr val="C8A45C"/>
+                </a:solidFill>
+                <a:latin typeface="DejaVu Sans"/>
+              </a:rPr>
+              <a:t>Hazır ve çalışıyor</a:t>
+            </a:r>
+          </a:p>
+        </p:txBody>
+      </p:sp>
+      <p:sp>
+        <p:nvSpPr>
+          <p:cNvPr id="7" name="TextBox 6"/>
+          <p:cNvSpPr txBox="1"/>
+          <p:nvPr/>
+        </p:nvSpPr>
+        <p:spPr>
+          <a:xfrm>
+            <a:off x="1051560" y="2761488"/>
+            <a:ext cx="4434840" cy="566928"/>
+          </a:xfrm>
+          <a:prstGeom prst="rect">
+            <a:avLst/>
+          </a:prstGeom>
+          <a:noFill/>
+        </p:spPr>
+        <p:txBody>
+          <a:bodyPr wrap="square" anchor="t" lIns="0" rIns="0" tIns="0" bIns="0">
+            <a:spAutoFit/>
+          </a:bodyPr>
+          <a:lstStyle/>
+          <a:p>
+            <a:pPr algn="l">
+              <a:spcAft>
+                <a:spcPts val="0"/>
+              </a:spcAft>
+            </a:pPr>
+            <a:r>
+              <a:rPr sz="1250" b="0">
                 <a:solidFill>
                   <a:srgbClr val="F2EAEC"/>
                 </a:solidFill>
                 <a:latin typeface="DejaVu Sans"/>
               </a:rPr>
-              <a:t>Uygulamadan Ekranlar</a:t>
-            </a:r>
-          </a:p>
-        </p:txBody>
-      </p:sp>
-      <p:sp>
-        <p:nvSpPr>
-          <p:cNvPr id="5" name="TextBox 4"/>
-          <p:cNvSpPr txBox="1"/>
-          <p:nvPr/>
-        </p:nvSpPr>
-        <p:spPr>
-          <a:xfrm>
-            <a:off x="1188720" y="3611880"/>
-            <a:ext cx="9601200" cy="548640"/>
-          </a:xfrm>
-          <a:prstGeom prst="rect">
-            <a:avLst/>
-          </a:prstGeom>
-          <a:noFill/>
-        </p:spPr>
-        <p:txBody>
-          <a:bodyPr wrap="square" anchor="t" lIns="0" rIns="0" tIns="0" bIns="0">
-            <a:spAutoFit/>
-          </a:bodyPr>
-          <a:lstStyle/>
-          <a:p>
-            <a:pPr algn="l">
-              <a:spcAft>
-                <a:spcPts val="0"/>
-              </a:spcAft>
-            </a:pPr>
-            <a:r>
-              <a:rPr sz="1600" b="0">
+              <a:t>·  Salon operasyonu · KDS · ödeme · gün sonu</a:t>
+            </a:r>
+          </a:p>
+        </p:txBody>
+      </p:sp>
+      <p:sp>
+        <p:nvSpPr>
+          <p:cNvPr id="8" name="TextBox 7"/>
+          <p:cNvSpPr txBox="1"/>
+          <p:nvPr/>
+        </p:nvSpPr>
+        <p:spPr>
+          <a:xfrm>
+            <a:off x="1051560" y="3328416"/>
+            <a:ext cx="4434840" cy="566928"/>
+          </a:xfrm>
+          <a:prstGeom prst="rect">
+            <a:avLst/>
+          </a:prstGeom>
+          <a:noFill/>
+        </p:spPr>
+        <p:txBody>
+          <a:bodyPr wrap="square" anchor="t" lIns="0" rIns="0" tIns="0" bIns="0">
+            <a:spAutoFit/>
+          </a:bodyPr>
+          <a:lstStyle/>
+          <a:p>
+            <a:pPr algn="l">
+              <a:spcAft>
+                <a:spcPts val="0"/>
+              </a:spcAft>
+            </a:pPr>
+            <a:r>
+              <a:rPr sz="1250" b="0">
+                <a:solidFill>
+                  <a:srgbClr val="F2EAEC"/>
+                </a:solidFill>
+                <a:latin typeface="DejaVu Sans"/>
+              </a:rPr>
+              <a:t>·  Şarap kavı · kadeh servisi · verim analizi</a:t>
+            </a:r>
+          </a:p>
+        </p:txBody>
+      </p:sp>
+      <p:sp>
+        <p:nvSpPr>
+          <p:cNvPr id="9" name="TextBox 8"/>
+          <p:cNvSpPr txBox="1"/>
+          <p:nvPr/>
+        </p:nvSpPr>
+        <p:spPr>
+          <a:xfrm>
+            <a:off x="1051560" y="3895344"/>
+            <a:ext cx="4434840" cy="566928"/>
+          </a:xfrm>
+          <a:prstGeom prst="rect">
+            <a:avLst/>
+          </a:prstGeom>
+          <a:noFill/>
+        </p:spPr>
+        <p:txBody>
+          <a:bodyPr wrap="square" anchor="t" lIns="0" rIns="0" tIns="0" bIns="0">
+            <a:spAutoFit/>
+          </a:bodyPr>
+          <a:lstStyle/>
+          <a:p>
+            <a:pPr algn="l">
+              <a:spcAft>
+                <a:spcPts val="0"/>
+              </a:spcAft>
+            </a:pPr>
+            <a:r>
+              <a:rPr sz="1250" b="0">
+                <a:solidFill>
+                  <a:srgbClr val="F2EAEC"/>
+                </a:solidFill>
+                <a:latin typeface="DejaVu Sans"/>
+              </a:rPr>
+              <a:t>·  Stok · satın alma · fire · sayım</a:t>
+            </a:r>
+          </a:p>
+        </p:txBody>
+      </p:sp>
+      <p:sp>
+        <p:nvSpPr>
+          <p:cNvPr id="10" name="TextBox 9"/>
+          <p:cNvSpPr txBox="1"/>
+          <p:nvPr/>
+        </p:nvSpPr>
+        <p:spPr>
+          <a:xfrm>
+            <a:off x="1051560" y="4462272"/>
+            <a:ext cx="4434840" cy="566928"/>
+          </a:xfrm>
+          <a:prstGeom prst="rect">
+            <a:avLst/>
+          </a:prstGeom>
+          <a:noFill/>
+        </p:spPr>
+        <p:txBody>
+          <a:bodyPr wrap="square" anchor="t" lIns="0" rIns="0" tIns="0" bIns="0">
+            <a:spAutoFit/>
+          </a:bodyPr>
+          <a:lstStyle/>
+          <a:p>
+            <a:pPr algn="l">
+              <a:spcAft>
+                <a:spcPts val="0"/>
+              </a:spcAft>
+            </a:pPr>
+            <a:r>
+              <a:rPr sz="1250" b="0">
+                <a:solidFill>
+                  <a:srgbClr val="F2EAEC"/>
+                </a:solidFill>
+                <a:latin typeface="DejaVu Sans"/>
+              </a:rPr>
+              <a:t>·  CRM · KVKK · personel · 13 rapor</a:t>
+            </a:r>
+          </a:p>
+        </p:txBody>
+      </p:sp>
+      <p:sp>
+        <p:nvSpPr>
+          <p:cNvPr id="11" name="TextBox 10"/>
+          <p:cNvSpPr txBox="1"/>
+          <p:nvPr/>
+        </p:nvSpPr>
+        <p:spPr>
+          <a:xfrm>
+            <a:off x="1051560" y="5029200"/>
+            <a:ext cx="4434840" cy="566928"/>
+          </a:xfrm>
+          <a:prstGeom prst="rect">
+            <a:avLst/>
+          </a:prstGeom>
+          <a:noFill/>
+        </p:spPr>
+        <p:txBody>
+          <a:bodyPr wrap="square" anchor="t" lIns="0" rIns="0" tIns="0" bIns="0">
+            <a:spAutoFit/>
+          </a:bodyPr>
+          <a:lstStyle/>
+          <a:p>
+            <a:pPr algn="l">
+              <a:spcAft>
+                <a:spcPts val="0"/>
+              </a:spcAft>
+            </a:pPr>
+            <a:r>
+              <a:rPr sz="1250" b="0">
+                <a:solidFill>
+                  <a:srgbClr val="F2EAEC"/>
+                </a:solidFill>
+                <a:latin typeface="DejaVu Sans"/>
+              </a:rPr>
+              <a:t>·  Yapay zekâ katmanı · yedekleme · 19 rol</a:t>
+            </a:r>
+          </a:p>
+        </p:txBody>
+      </p:sp>
+      <p:sp>
+        <p:nvSpPr>
+          <p:cNvPr id="12" name="Rounded Rectangle 11"/>
+          <p:cNvSpPr/>
+          <p:nvPr/>
+        </p:nvSpPr>
+        <p:spPr>
+          <a:xfrm>
+            <a:off x="6492240" y="1965960"/>
+            <a:ext cx="4919472" cy="3657600"/>
+          </a:xfrm>
+          <a:prstGeom prst="roundRect">
+            <a:avLst>
+              <a:gd name="adj" fmla="val 6000"/>
+            </a:avLst>
+          </a:prstGeom>
+          <a:solidFill>
+            <a:srgbClr val="241419"/>
+          </a:solidFill>
+          <a:ln w="12700">
+            <a:solidFill>
+              <a:srgbClr val="3D2530"/>
+            </a:solidFill>
+          </a:ln>
+          <a:effectLst/>
+        </p:spPr>
+        <p:style>
+          <a:lnRef idx="1">
+            <a:schemeClr val="accent1"/>
+          </a:lnRef>
+          <a:fillRef idx="3">
+            <a:schemeClr val="accent1"/>
+          </a:fillRef>
+          <a:effectRef idx="2">
+            <a:schemeClr val="accent1"/>
+          </a:effectRef>
+          <a:fontRef idx="minor">
+            <a:schemeClr val="lt1"/>
+          </a:fontRef>
+        </p:style>
+        <p:txBody>
+          <a:bodyPr rtlCol="0" anchor="ctr"/>
+          <a:lstStyle/>
+          <a:p>
+            <a:pPr algn="ctr"/>
+          </a:p>
+        </p:txBody>
+      </p:sp>
+      <p:sp>
+        <p:nvSpPr>
+          <p:cNvPr id="13" name="Rectangle 12"/>
+          <p:cNvSpPr/>
+          <p:nvPr/>
+        </p:nvSpPr>
+        <p:spPr>
+          <a:xfrm>
+            <a:off x="6492240" y="1965960"/>
+            <a:ext cx="4919472" cy="50800"/>
+          </a:xfrm>
+          <a:prstGeom prst="rect">
+            <a:avLst/>
+          </a:prstGeom>
+          <a:solidFill>
+            <a:srgbClr val="C8A45C"/>
+          </a:solidFill>
+          <a:ln>
+            <a:noFill/>
+          </a:ln>
+          <a:effectLst/>
+        </p:spPr>
+        <p:style>
+          <a:lnRef idx="1">
+            <a:schemeClr val="accent1"/>
+          </a:lnRef>
+          <a:fillRef idx="3">
+            <a:schemeClr val="accent1"/>
+          </a:fillRef>
+          <a:effectRef idx="2">
+            <a:schemeClr val="accent1"/>
+          </a:effectRef>
+          <a:fontRef idx="minor">
+            <a:schemeClr val="lt1"/>
+          </a:fontRef>
+        </p:style>
+        <p:txBody>
+          <a:bodyPr rtlCol="0" anchor="ctr"/>
+          <a:lstStyle/>
+          <a:p>
+            <a:pPr algn="ctr"/>
+          </a:p>
+        </p:txBody>
+      </p:sp>
+      <p:sp>
+        <p:nvSpPr>
+          <p:cNvPr id="14" name="TextBox 13"/>
+          <p:cNvSpPr txBox="1"/>
+          <p:nvPr/>
+        </p:nvSpPr>
+        <p:spPr>
+          <a:xfrm>
+            <a:off x="6766559" y="2212848"/>
+            <a:ext cx="4389120" cy="457200"/>
+          </a:xfrm>
+          <a:prstGeom prst="rect">
+            <a:avLst/>
+          </a:prstGeom>
+          <a:noFill/>
+        </p:spPr>
+        <p:txBody>
+          <a:bodyPr wrap="square" anchor="t" lIns="0" rIns="0" tIns="0" bIns="0">
+            <a:spAutoFit/>
+          </a:bodyPr>
+          <a:lstStyle/>
+          <a:p>
+            <a:pPr algn="l">
+              <a:spcAft>
+                <a:spcPts val="0"/>
+              </a:spcAft>
+            </a:pPr>
+            <a:r>
+              <a:rPr sz="1500" b="1">
                 <a:solidFill>
                   <a:srgbClr val="C8A45C"/>
                 </a:solidFill>
                 <a:latin typeface="DejaVu Sans"/>
               </a:rPr>
-              <a:t>Gerçek arayüz · sentetik demo verisi · v0.1.0</a:t>
-            </a:r>
-          </a:p>
-        </p:txBody>
-      </p:sp>
-      <p:sp>
-        <p:nvSpPr>
-          <p:cNvPr id="6" name="TextBox 5"/>
-          <p:cNvSpPr txBox="1"/>
-          <p:nvPr/>
-        </p:nvSpPr>
-        <p:spPr>
-          <a:xfrm>
-            <a:off x="777240" y="1463040"/>
-            <a:ext cx="3657600" cy="365760"/>
+              <a:t>Deneysel veya planlandı</a:t>
+            </a:r>
+          </a:p>
+        </p:txBody>
+      </p:sp>
+      <p:sp>
+        <p:nvSpPr>
+          <p:cNvPr id="15" name="TextBox 14"/>
+          <p:cNvSpPr txBox="1"/>
+          <p:nvPr/>
+        </p:nvSpPr>
+        <p:spPr>
+          <a:xfrm>
+            <a:off x="6766559" y="2761488"/>
+            <a:ext cx="4434840" cy="566928"/>
+          </a:xfrm>
+          <a:prstGeom prst="rect">
+            <a:avLst/>
+          </a:prstGeom>
+          <a:noFill/>
+        </p:spPr>
+        <p:txBody>
+          <a:bodyPr wrap="square" anchor="t" lIns="0" rIns="0" tIns="0" bIns="0">
+            <a:spAutoFit/>
+          </a:bodyPr>
+          <a:lstStyle/>
+          <a:p>
+            <a:pPr algn="l">
+              <a:spcAft>
+                <a:spcPts val="0"/>
+              </a:spcAft>
+            </a:pPr>
+            <a:r>
+              <a:rPr sz="1250" b="0">
+                <a:solidFill>
+                  <a:srgbClr val="F2EAEC"/>
+                </a:solidFill>
+                <a:latin typeface="DejaVu Sans"/>
+              </a:rPr>
+              <a:t>·  Canlı ödeme ve e-Fatura (yalnızca adaptör)</a:t>
+            </a:r>
+          </a:p>
+        </p:txBody>
+      </p:sp>
+      <p:sp>
+        <p:nvSpPr>
+          <p:cNvPr id="16" name="TextBox 15"/>
+          <p:cNvSpPr txBox="1"/>
+          <p:nvPr/>
+        </p:nvSpPr>
+        <p:spPr>
+          <a:xfrm>
+            <a:off x="6766559" y="3328416"/>
+            <a:ext cx="4434840" cy="566928"/>
+          </a:xfrm>
+          <a:prstGeom prst="rect">
+            <a:avLst/>
+          </a:prstGeom>
+          <a:noFill/>
+        </p:spPr>
+        <p:txBody>
+          <a:bodyPr wrap="square" anchor="t" lIns="0" rIns="0" tIns="0" bIns="0">
+            <a:spAutoFit/>
+          </a:bodyPr>
+          <a:lstStyle/>
+          <a:p>
+            <a:pPr algn="l">
+              <a:spcAft>
+                <a:spcPts val="0"/>
+              </a:spcAft>
+            </a:pPr>
+            <a:r>
+              <a:rPr sz="1250" b="0">
+                <a:solidFill>
+                  <a:srgbClr val="F2EAEC"/>
+                </a:solidFill>
+                <a:latin typeface="DejaVu Sans"/>
+              </a:rPr>
+              <a:t>·  Termal yazıcı sürücüsü</a:t>
+            </a:r>
+          </a:p>
+        </p:txBody>
+      </p:sp>
+      <p:sp>
+        <p:nvSpPr>
+          <p:cNvPr id="17" name="TextBox 16"/>
+          <p:cNvSpPr txBox="1"/>
+          <p:nvPr/>
+        </p:nvSpPr>
+        <p:spPr>
+          <a:xfrm>
+            <a:off x="6766559" y="3895344"/>
+            <a:ext cx="4434840" cy="566928"/>
+          </a:xfrm>
+          <a:prstGeom prst="rect">
+            <a:avLst/>
+          </a:prstGeom>
+          <a:noFill/>
+        </p:spPr>
+        <p:txBody>
+          <a:bodyPr wrap="square" anchor="t" lIns="0" rIns="0" tIns="0" bIns="0">
+            <a:spAutoFit/>
+          </a:bodyPr>
+          <a:lstStyle/>
+          <a:p>
+            <a:pPr algn="l">
+              <a:spcAft>
+                <a:spcPts val="0"/>
+              </a:spcAft>
+            </a:pPr>
+            <a:r>
+              <a:rPr sz="1250" b="0">
+                <a:solidFill>
+                  <a:srgbClr val="F2EAEC"/>
+                </a:solidFill>
+                <a:latin typeface="DejaVu Sans"/>
+              </a:rPr>
+              <a:t>·  Toplu e-posta/SMS gönderimi</a:t>
+            </a:r>
+          </a:p>
+        </p:txBody>
+      </p:sp>
+      <p:sp>
+        <p:nvSpPr>
+          <p:cNvPr id="18" name="TextBox 17"/>
+          <p:cNvSpPr txBox="1"/>
+          <p:nvPr/>
+        </p:nvSpPr>
+        <p:spPr>
+          <a:xfrm>
+            <a:off x="6766559" y="4462272"/>
+            <a:ext cx="4434840" cy="566928"/>
+          </a:xfrm>
+          <a:prstGeom prst="rect">
+            <a:avLst/>
+          </a:prstGeom>
+          <a:noFill/>
+        </p:spPr>
+        <p:txBody>
+          <a:bodyPr wrap="square" anchor="t" lIns="0" rIns="0" tIns="0" bIns="0">
+            <a:spAutoFit/>
+          </a:bodyPr>
+          <a:lstStyle/>
+          <a:p>
+            <a:pPr algn="l">
+              <a:spcAft>
+                <a:spcPts val="0"/>
+              </a:spcAft>
+            </a:pPr>
+            <a:r>
+              <a:rPr sz="1250" b="0">
+                <a:solidFill>
+                  <a:srgbClr val="F2EAEC"/>
+                </a:solidFill>
+                <a:latin typeface="DejaVu Sans"/>
+              </a:rPr>
+              <a:t>·  Kav sensör entegrasyonu</a:t>
+            </a:r>
+          </a:p>
+        </p:txBody>
+      </p:sp>
+      <p:sp>
+        <p:nvSpPr>
+          <p:cNvPr id="19" name="TextBox 18"/>
+          <p:cNvSpPr txBox="1"/>
+          <p:nvPr/>
+        </p:nvSpPr>
+        <p:spPr>
+          <a:xfrm>
+            <a:off x="6766559" y="5029200"/>
+            <a:ext cx="4434840" cy="566928"/>
+          </a:xfrm>
+          <a:prstGeom prst="rect">
+            <a:avLst/>
+          </a:prstGeom>
+          <a:noFill/>
+        </p:spPr>
+        <p:txBody>
+          <a:bodyPr wrap="square" anchor="t" lIns="0" rIns="0" tIns="0" bIns="0">
+            <a:spAutoFit/>
+          </a:bodyPr>
+          <a:lstStyle/>
+          <a:p>
+            <a:pPr algn="l">
+              <a:spcAft>
+                <a:spcPts val="0"/>
+              </a:spcAft>
+            </a:pPr>
+            <a:r>
+              <a:rPr sz="1250" b="0">
+                <a:solidFill>
+                  <a:srgbClr val="F2EAEC"/>
+                </a:solidFill>
+                <a:latin typeface="DejaVu Sans"/>
+              </a:rPr>
+              <a:t>·  Etiket görsel analizi · çok terminalli senkronizasyon</a:t>
+            </a:r>
+          </a:p>
+        </p:txBody>
+      </p:sp>
+      <p:sp>
+        <p:nvSpPr>
+          <p:cNvPr id="20" name="TextBox 19"/>
+          <p:cNvSpPr txBox="1"/>
+          <p:nvPr/>
+        </p:nvSpPr>
+        <p:spPr>
+          <a:xfrm>
+            <a:off x="777240" y="5779008"/>
+            <a:ext cx="10607040" cy="457200"/>
           </a:xfrm>
           <a:prstGeom prst="rect">
             <a:avLst/>
@@ -32843,14 +33059,14 @@
                 </a:solidFill>
                 <a:latin typeface="DejaVu Sans"/>
               </a:rPr>
-              <a:t>42 / 57</a:t>
-            </a:r>
-          </a:p>
-        </p:txBody>
-      </p:sp>
-      <p:sp>
-        <p:nvSpPr>
-          <p:cNvPr id="7" name="TextBox 6"/>
+              <a:t>Her özellik uygulamada rozetle işaretlenir: Hazır · Deneysel · Planlandı</a:t>
+            </a:r>
+          </a:p>
+        </p:txBody>
+      </p:sp>
+      <p:sp>
+        <p:nvSpPr>
+          <p:cNvPr id="21" name="TextBox 20"/>
           <p:cNvSpPr txBox="1"/>
           <p:nvPr/>
         </p:nvSpPr>
@@ -32889,7 +33105,7 @@
       </p:sp>
       <p:sp>
         <p:nvSpPr>
-          <p:cNvPr id="8" name="TextBox 7"/>
+          <p:cNvPr id="22" name="TextBox 21"/>
           <p:cNvSpPr txBox="1"/>
           <p:nvPr/>
         </p:nvSpPr>
@@ -32954,40 +33170,45 @@
       <p:grpSpPr/>
       <p:sp>
         <p:nvSpPr>
-          <p:cNvPr id="2" name="TextBox 1"/>
-          <p:cNvSpPr txBox="1"/>
-          <p:nvPr/>
-        </p:nvSpPr>
-        <p:spPr>
-          <a:xfrm>
-            <a:off x="777240" y="566928"/>
-            <a:ext cx="10607040" cy="914400"/>
-          </a:xfrm>
-          <a:prstGeom prst="rect">
-            <a:avLst/>
-          </a:prstGeom>
-          <a:noFill/>
-        </p:spPr>
-        <p:txBody>
-          <a:bodyPr wrap="square" anchor="t" lIns="0" rIns="0" tIns="0" bIns="0">
-            <a:spAutoFit/>
-          </a:bodyPr>
-          <a:lstStyle/>
-          <a:p>
-            <a:pPr algn="l">
-              <a:spcAft>
-                <a:spcPts val="0"/>
-              </a:spcAft>
-            </a:pPr>
-            <a:r>
-              <a:rPr sz="3000" b="1">
-                <a:solidFill>
-                  <a:srgbClr val="F2EAEC"/>
-                </a:solidFill>
-                <a:latin typeface="DejaVu Sans"/>
-              </a:rPr>
-              <a:t>Giriş ekranı</a:t>
-            </a:r>
+          <p:cNvPr id="2" name="Rectangle 1"/>
+          <p:cNvSpPr/>
+          <p:nvPr/>
+        </p:nvSpPr>
+        <p:spPr>
+          <a:xfrm>
+            <a:off x="0" y="2514600"/>
+            <a:ext cx="12191969" cy="1828800"/>
+          </a:xfrm>
+          <a:prstGeom prst="rect">
+            <a:avLst/>
+          </a:prstGeom>
+          <a:solidFill>
+            <a:srgbClr val="241419"/>
+          </a:solidFill>
+          <a:ln>
+            <a:noFill/>
+          </a:ln>
+          <a:effectLst/>
+        </p:spPr>
+        <p:style>
+          <a:lnRef idx="1">
+            <a:schemeClr val="accent1"/>
+          </a:lnRef>
+          <a:fillRef idx="3">
+            <a:schemeClr val="accent1"/>
+          </a:fillRef>
+          <a:effectRef idx="2">
+            <a:schemeClr val="accent1"/>
+          </a:effectRef>
+          <a:fontRef idx="minor">
+            <a:schemeClr val="lt1"/>
+          </a:fontRef>
+        </p:style>
+        <p:txBody>
+          <a:bodyPr rtlCol="0" anchor="ctr"/>
+          <a:lstStyle/>
+          <a:p>
+            <a:pPr algn="ctr"/>
           </a:p>
         </p:txBody>
       </p:sp>
@@ -32999,8 +33220,8 @@
         </p:nvSpPr>
         <p:spPr>
           <a:xfrm>
-            <a:off x="777240" y="1572768"/>
-            <a:ext cx="1371600" cy="38100"/>
+            <a:off x="777240" y="2514600"/>
+            <a:ext cx="63500" cy="1828800"/>
           </a:xfrm>
           <a:prstGeom prst="rect">
             <a:avLst/>
@@ -33037,76 +33258,82 @@
       </p:sp>
       <p:sp>
         <p:nvSpPr>
-          <p:cNvPr id="4" name="Rounded Rectangle 3"/>
-          <p:cNvSpPr/>
-          <p:nvPr/>
-        </p:nvSpPr>
-        <p:spPr>
-          <a:xfrm>
-            <a:off x="2815437" y="1801368"/>
-            <a:ext cx="6558076" cy="4133087"/>
-          </a:xfrm>
-          <a:prstGeom prst="roundRect">
-            <a:avLst>
-              <a:gd name="adj" fmla="val 6000"/>
-            </a:avLst>
-          </a:prstGeom>
-          <a:solidFill>
-            <a:srgbClr val="241419"/>
-          </a:solidFill>
-          <a:ln w="12700">
-            <a:solidFill>
-              <a:srgbClr val="3D2530"/>
-            </a:solidFill>
-          </a:ln>
-          <a:effectLst/>
-        </p:spPr>
-        <p:style>
-          <a:lnRef idx="1">
-            <a:schemeClr val="accent1"/>
-          </a:lnRef>
-          <a:fillRef idx="3">
-            <a:schemeClr val="accent1"/>
-          </a:fillRef>
-          <a:effectRef idx="2">
-            <a:schemeClr val="accent1"/>
-          </a:effectRef>
-          <a:fontRef idx="minor">
-            <a:schemeClr val="lt1"/>
-          </a:fontRef>
-        </p:style>
-        <p:txBody>
-          <a:bodyPr rtlCol="0" anchor="ctr"/>
-          <a:lstStyle/>
-          <a:p>
-            <a:pPr algn="ctr"/>
-          </a:p>
-        </p:txBody>
-      </p:sp>
-      <p:pic>
-        <p:nvPicPr>
-          <p:cNvPr id="5" name="Picture 4" descr="login.png"/>
-          <p:cNvPicPr>
-            <a:picLocks noChangeAspect="1"/>
-          </p:cNvPicPr>
-          <p:nvPr/>
-        </p:nvPicPr>
-        <p:blipFill>
-          <a:blip r:embed="rId2"/>
-          <a:stretch>
-            <a:fillRect/>
-          </a:stretch>
-        </p:blipFill>
-        <p:spPr>
-          <a:xfrm>
-            <a:off x="2861157" y="1847088"/>
-            <a:ext cx="6466636" cy="4041648"/>
-          </a:xfrm>
-          <a:prstGeom prst="rect">
-            <a:avLst/>
-          </a:prstGeom>
-        </p:spPr>
-      </p:pic>
+          <p:cNvPr id="4" name="TextBox 3"/>
+          <p:cNvSpPr txBox="1"/>
+          <p:nvPr/>
+        </p:nvSpPr>
+        <p:spPr>
+          <a:xfrm>
+            <a:off x="1188720" y="2834640"/>
+            <a:ext cx="9601200" cy="822960"/>
+          </a:xfrm>
+          <a:prstGeom prst="rect">
+            <a:avLst/>
+          </a:prstGeom>
+          <a:noFill/>
+        </p:spPr>
+        <p:txBody>
+          <a:bodyPr wrap="square" anchor="t" lIns="0" rIns="0" tIns="0" bIns="0">
+            <a:spAutoFit/>
+          </a:bodyPr>
+          <a:lstStyle/>
+          <a:p>
+            <a:pPr algn="l">
+              <a:spcAft>
+                <a:spcPts val="0"/>
+              </a:spcAft>
+            </a:pPr>
+            <a:r>
+              <a:rPr sz="4000" b="1">
+                <a:solidFill>
+                  <a:srgbClr val="F2EAEC"/>
+                </a:solidFill>
+                <a:latin typeface="DejaVu Sans"/>
+              </a:rPr>
+              <a:t>Uygulamadan Ekranlar</a:t>
+            </a:r>
+          </a:p>
+        </p:txBody>
+      </p:sp>
+      <p:sp>
+        <p:nvSpPr>
+          <p:cNvPr id="5" name="TextBox 4"/>
+          <p:cNvSpPr txBox="1"/>
+          <p:nvPr/>
+        </p:nvSpPr>
+        <p:spPr>
+          <a:xfrm>
+            <a:off x="1188720" y="3611880"/>
+            <a:ext cx="9601200" cy="548640"/>
+          </a:xfrm>
+          <a:prstGeom prst="rect">
+            <a:avLst/>
+          </a:prstGeom>
+          <a:noFill/>
+        </p:spPr>
+        <p:txBody>
+          <a:bodyPr wrap="square" anchor="t" lIns="0" rIns="0" tIns="0" bIns="0">
+            <a:spAutoFit/>
+          </a:bodyPr>
+          <a:lstStyle/>
+          <a:p>
+            <a:pPr algn="l">
+              <a:spcAft>
+                <a:spcPts val="0"/>
+              </a:spcAft>
+            </a:pPr>
+            <a:r>
+              <a:rPr sz="1600" b="0">
+                <a:solidFill>
+                  <a:srgbClr val="C8A45C"/>
+                </a:solidFill>
+                <a:latin typeface="DejaVu Sans"/>
+              </a:rPr>
+              <a:t>Gerçek arayüz · sentetik demo verisi · v0.1.0</a:t>
+            </a:r>
+          </a:p>
+        </p:txBody>
+      </p:sp>
       <p:sp>
         <p:nvSpPr>
           <p:cNvPr id="6" name="TextBox 5"/>
@@ -33115,33 +33342,33 @@
         </p:nvSpPr>
         <p:spPr>
           <a:xfrm>
-            <a:off x="777240" y="6016751"/>
-            <a:ext cx="10607040" cy="457200"/>
-          </a:xfrm>
-          <a:prstGeom prst="rect">
-            <a:avLst/>
-          </a:prstGeom>
-          <a:noFill/>
-        </p:spPr>
-        <p:txBody>
-          <a:bodyPr wrap="square" anchor="t" lIns="0" rIns="0" tIns="0" bIns="0">
-            <a:spAutoFit/>
-          </a:bodyPr>
-          <a:lstStyle/>
-          <a:p>
-            <a:pPr algn="l">
-              <a:spcAft>
-                <a:spcPts val="0"/>
-              </a:spcAft>
-            </a:pPr>
-            <a:r>
-              <a:rPr sz="1150" b="0">
+            <a:off x="777240" y="1463040"/>
+            <a:ext cx="3657600" cy="365760"/>
+          </a:xfrm>
+          <a:prstGeom prst="rect">
+            <a:avLst/>
+          </a:prstGeom>
+          <a:noFill/>
+        </p:spPr>
+        <p:txBody>
+          <a:bodyPr wrap="square" anchor="t" lIns="0" rIns="0" tIns="0" bIns="0">
+            <a:spAutoFit/>
+          </a:bodyPr>
+          <a:lstStyle/>
+          <a:p>
+            <a:pPr algn="l">
+              <a:spcAft>
+                <a:spcPts val="0"/>
+              </a:spcAft>
+            </a:pPr>
+            <a:r>
+              <a:rPr sz="1100" b="0">
                 <a:solidFill>
                   <a:srgbClr val="B9A7AE"/>
                 </a:solidFill>
                 <a:latin typeface="DejaVu Sans"/>
               </a:rPr>
-              <a:t>Parola veya hızlı PIN girişi · rol tabanlı yetkilendirme 19 rolle başlar</a:t>
+              <a:t>43 / 58</a:t>
             </a:r>
           </a:p>
         </p:txBody>
@@ -33284,7 +33511,7 @@
                 </a:solidFill>
                 <a:latin typeface="DejaVu Sans"/>
               </a:rPr>
-              <a:t>Ana panel</a:t>
+              <a:t>Giriş ekranı</a:t>
             </a:r>
           </a:p>
         </p:txBody>
@@ -33383,7 +33610,7 @@
       </p:sp>
       <p:pic>
         <p:nvPicPr>
-          <p:cNvPr id="5" name="Picture 4" descr="dashboard.png"/>
+          <p:cNvPr id="5" name="Picture 4" descr="login.png"/>
           <p:cNvPicPr>
             <a:picLocks noChangeAspect="1"/>
           </p:cNvPicPr>
@@ -33439,7 +33666,7 @@
                 </a:solidFill>
                 <a:latin typeface="DejaVu Sans"/>
               </a:rPr>
-              <a:t>Masa durumu, açık adisyon, rezervasyon, kav ve satış özetleri tek bakışta; deneysel özellikler açıkça rozetlenir</a:t>
+              <a:t>Parola veya hızlı PIN girişi · rol tabanlı yetkilendirme 19 rolle başlar</a:t>
             </a:r>
           </a:p>
         </p:txBody>
@@ -33582,7 +33809,7 @@
                 </a:solidFill>
                 <a:latin typeface="DejaVu Sans"/>
               </a:rPr>
-              <a:t>Masa planı</a:t>
+              <a:t>Ana panel</a:t>
             </a:r>
           </a:p>
         </p:txBody>
@@ -33681,7 +33908,7 @@
       </p:sp>
       <p:pic>
         <p:nvPicPr>
-          <p:cNvPr id="5" name="Picture 4" descr="masa-plani.png"/>
+          <p:cNvPr id="5" name="Picture 4" descr="dashboard.png"/>
           <p:cNvPicPr>
             <a:picLocks noChangeAspect="1"/>
           </p:cNvPicPr>
@@ -33737,7 +33964,7 @@
                 </a:solidFill>
                 <a:latin typeface="DejaVu Sans"/>
               </a:rPr>
-              <a:t>Bölüm bazlı canlı masa durumu ve açık adisyon bağlantıları</a:t>
+              <a:t>Masa durumu, açık adisyon, rezervasyon, kav ve satış özetleri tek bakışta; deneysel özellikler açıkça rozetlenir</a:t>
             </a:r>
           </a:p>
         </p:txBody>
@@ -33880,7 +34107,7 @@
                 </a:solidFill>
                 <a:latin typeface="DejaVu Sans"/>
               </a:rPr>
-              <a:t>Adisyonlar</a:t>
+              <a:t>Masa planı</a:t>
             </a:r>
           </a:p>
         </p:txBody>
@@ -33979,7 +34206,7 @@
       </p:sp>
       <p:pic>
         <p:nvPicPr>
-          <p:cNvPr id="5" name="Picture 4" descr="adisyonlar.png"/>
+          <p:cNvPr id="5" name="Picture 4" descr="masa-plani.png"/>
           <p:cNvPicPr>
             <a:picLocks noChangeAspect="1"/>
           </p:cNvPicPr>
@@ -34035,7 +34262,7 @@
                 </a:solidFill>
                 <a:latin typeface="DejaVu Sans"/>
               </a:rPr>
-              <a:t>Fiyat dondurma, satır iptali, indirim/ikram ve onay akışıyla sipariş yönetimi</a:t>
+              <a:t>Bölüm bazlı canlı masa durumu ve açık adisyon bağlantıları</a:t>
             </a:r>
           </a:p>
         </p:txBody>
@@ -34178,7 +34405,7 @@
                 </a:solidFill>
                 <a:latin typeface="DejaVu Sans"/>
               </a:rPr>
-              <a:t>Rezervasyonlar</a:t>
+              <a:t>Adisyonlar</a:t>
             </a:r>
           </a:p>
         </p:txBody>
@@ -34277,7 +34504,7 @@
       </p:sp>
       <p:pic>
         <p:nvPicPr>
-          <p:cNvPr id="5" name="Picture 4" descr="rezervasyonlar.png"/>
+          <p:cNvPr id="5" name="Picture 4" descr="adisyonlar.png"/>
           <p:cNvPicPr>
             <a:picLocks noChangeAspect="1"/>
           </p:cNvPicPr>
@@ -34333,7 +34560,7 @@
                 </a:solidFill>
                 <a:latin typeface="DejaVu Sans"/>
               </a:rPr>
-              <a:t>Çakışma denetimi, kapasite kontrolü ve bekleme listesi</a:t>
+              <a:t>Fiyat dondurma, satır iptali, indirim/ikram ve onay akışıyla sipariş yönetimi</a:t>
             </a:r>
           </a:p>
         </p:txBody>
@@ -34476,7 +34703,7 @@
                 </a:solidFill>
                 <a:latin typeface="DejaVu Sans"/>
               </a:rPr>
-              <a:t>Mutfak ekranı (KDS)</a:t>
+              <a:t>Rezervasyonlar</a:t>
             </a:r>
           </a:p>
         </p:txBody>
@@ -34575,7 +34802,7 @@
       </p:sp>
       <p:pic>
         <p:nvPicPr>
-          <p:cNvPr id="5" name="Picture 4" descr="kds-mutfak.png"/>
+          <p:cNvPr id="5" name="Picture 4" descr="rezervasyonlar.png"/>
           <p:cNvPicPr>
             <a:picLocks noChangeAspect="1"/>
           </p:cNvPicPr>
@@ -34631,7 +34858,7 @@
                 </a:solidFill>
                 <a:latin typeface="DejaVu Sans"/>
               </a:rPr>
-              <a:t>İstasyon ayrımı, fiş ilerletme, gecikme uyarısı ve alerjen gösterimi</a:t>
+              <a:t>Çakışma denetimi, kapasite kontrolü ve bekleme listesi</a:t>
             </a:r>
           </a:p>
         </p:txBody>
@@ -34774,7 +35001,7 @@
                 </a:solidFill>
                 <a:latin typeface="DejaVu Sans"/>
               </a:rPr>
-              <a:t>Şarap kavı</a:t>
+              <a:t>Mutfak ekranı (KDS)</a:t>
             </a:r>
           </a:p>
         </p:txBody>
@@ -34873,7 +35100,7 @@
       </p:sp>
       <p:pic>
         <p:nvPicPr>
-          <p:cNvPr id="5" name="Picture 4" descr="sarap-kavi.png"/>
+          <p:cNvPr id="5" name="Picture 4" descr="kds-mutfak.png"/>
           <p:cNvPicPr>
             <a:picLocks noChangeAspect="1"/>
           </p:cNvPicPr>
@@ -34929,7 +35156,7 @@
                 </a:solidFill>
                 <a:latin typeface="DejaVu Sans"/>
               </a:rPr>
-              <a:t>Şişe/kadeh stoğu, içim aralığı ve fiyatlandırma; sorumlu servis uyarısı her listede</a:t>
+              <a:t>İstasyon ayrımı, fiş ilerletme, gecikme uyarısı ve alerjen gösterimi</a:t>
             </a:r>
           </a:p>
         </p:txBody>
@@ -36461,7 +36688,7 @@
                 </a:solidFill>
                 <a:latin typeface="DejaVu Sans"/>
               </a:rPr>
-              <a:t>Kav değerlemesi</a:t>
+              <a:t>Şarap kavı</a:t>
             </a:r>
           </a:p>
         </p:txBody>
@@ -36560,7 +36787,7 @@
       </p:sp>
       <p:pic>
         <p:nvPicPr>
-          <p:cNvPr id="5" name="Picture 4" descr="kav-degerleme.png"/>
+          <p:cNvPr id="5" name="Picture 4" descr="sarap-kavi.png"/>
           <p:cNvPicPr>
             <a:picLocks noChangeAspect="1"/>
           </p:cNvPicPr>
@@ -36616,7 +36843,7 @@
                 </a:solidFill>
                 <a:latin typeface="DejaVu Sans"/>
               </a:rPr>
-              <a:t>Maliyet ve satış değeri üzerinden kavın anlık finansal görünümü</a:t>
+              <a:t>Şişe/kadeh stoğu, içim aralığı ve fiyatlandırma; sorumlu servis uyarısı her listede</a:t>
             </a:r>
           </a:p>
         </p:txBody>
@@ -36759,7 +36986,7 @@
                 </a:solidFill>
                 <a:latin typeface="DejaVu Sans"/>
               </a:rPr>
-              <a:t>Menü ve reçete</a:t>
+              <a:t>Kav değerlemesi</a:t>
             </a:r>
           </a:p>
         </p:txBody>
@@ -36858,7 +37085,7 @@
       </p:sp>
       <p:pic>
         <p:nvPicPr>
-          <p:cNvPr id="5" name="Picture 4" descr="menu.png"/>
+          <p:cNvPr id="5" name="Picture 4" descr="kav-degerleme.png"/>
           <p:cNvPicPr>
             <a:picLocks noChangeAspect="1"/>
           </p:cNvPicPr>
@@ -36914,7 +37141,7 @@
                 </a:solidFill>
                 <a:latin typeface="DejaVu Sans"/>
               </a:rPr>
-              <a:t>Porsiyon maliyeti, alerjen ve beslenme etiketiyle menü yönetimi</a:t>
+              <a:t>Maliyet ve satış değeri üzerinden kavın anlık finansal görünümü</a:t>
             </a:r>
           </a:p>
         </p:txBody>
@@ -37057,7 +37284,7 @@
                 </a:solidFill>
                 <a:latin typeface="DejaVu Sans"/>
               </a:rPr>
-              <a:t>Stok ve satın alma</a:t>
+              <a:t>Menü ve reçete</a:t>
             </a:r>
           </a:p>
         </p:txBody>
@@ -37156,7 +37383,7 @@
       </p:sp>
       <p:pic>
         <p:nvPicPr>
-          <p:cNvPr id="5" name="Picture 4" descr="stok.png"/>
+          <p:cNvPr id="5" name="Picture 4" descr="menu.png"/>
           <p:cNvPicPr>
             <a:picLocks noChangeAspect="1"/>
           </p:cNvPicPr>
@@ -37212,7 +37439,7 @@
                 </a:solidFill>
                 <a:latin typeface="DejaVu Sans"/>
               </a:rPr>
-              <a:t>FIFO/FEFO parti takibi, mal kabul, sayım ve fire akışları</a:t>
+              <a:t>Porsiyon maliyeti, alerjen ve beslenme etiketiyle menü yönetimi</a:t>
             </a:r>
           </a:p>
         </p:txBody>
@@ -37355,7 +37582,7 @@
                 </a:solidFill>
                 <a:latin typeface="DejaVu Sans"/>
               </a:rPr>
-              <a:t>Müşteri ilişkileri</a:t>
+              <a:t>Stok ve satın alma</a:t>
             </a:r>
           </a:p>
         </p:txBody>
@@ -37454,7 +37681,7 @@
       </p:sp>
       <p:pic>
         <p:nvPicPr>
-          <p:cNvPr id="5" name="Picture 4" descr="crm.png"/>
+          <p:cNvPr id="5" name="Picture 4" descr="stok.png"/>
           <p:cNvPicPr>
             <a:picLocks noChangeAspect="1"/>
           </p:cNvPicPr>
@@ -37510,7 +37737,7 @@
                 </a:solidFill>
                 <a:latin typeface="DejaVu Sans"/>
               </a:rPr>
-              <a:t>Rıza yönetimi, dışa aktarım, anonimleştirme ve sadakat — KVKK akışları yerleşik</a:t>
+              <a:t>FIFO/FEFO parti takibi, mal kabul, sayım ve fire akışları</a:t>
             </a:r>
           </a:p>
         </p:txBody>
@@ -37653,7 +37880,7 @@
                 </a:solidFill>
                 <a:latin typeface="DejaVu Sans"/>
               </a:rPr>
-              <a:t>Raporlar</a:t>
+              <a:t>Müşteri ilişkileri</a:t>
             </a:r>
           </a:p>
         </p:txBody>
@@ -37752,7 +37979,7 @@
       </p:sp>
       <p:pic>
         <p:nvPicPr>
-          <p:cNvPr id="5" name="Picture 4" descr="raporlar.png"/>
+          <p:cNvPr id="5" name="Picture 4" descr="crm.png"/>
           <p:cNvPicPr>
             <a:picLocks noChangeAspect="1"/>
           </p:cNvPicPr>
@@ -37808,7 +38035,7 @@
                 </a:solidFill>
                 <a:latin typeface="DejaVu Sans"/>
               </a:rPr>
-              <a:t>13 hazır rapor · PDF, Excel ve CSV dışa aktarım</a:t>
+              <a:t>Rıza yönetimi, dışa aktarım, anonimleştirme ve sadakat — KVKK akışları yerleşik</a:t>
             </a:r>
           </a:p>
         </p:txBody>
@@ -37951,7 +38178,7 @@
                 </a:solidFill>
                 <a:latin typeface="DejaVu Sans"/>
               </a:rPr>
-              <a:t>Yapay zekâ asistanı</a:t>
+              <a:t>Raporlar</a:t>
             </a:r>
           </a:p>
         </p:txBody>
@@ -38050,7 +38277,7 @@
       </p:sp>
       <p:pic>
         <p:nvPicPr>
-          <p:cNvPr id="5" name="Picture 4" descr="yapay-zeka.png"/>
+          <p:cNvPr id="5" name="Picture 4" descr="raporlar.png"/>
           <p:cNvPicPr>
             <a:picLocks noChangeAspect="1"/>
           </p:cNvPicPr>
@@ -38106,7 +38333,7 @@
                 </a:solidFill>
                 <a:latin typeface="DejaVu Sans"/>
               </a:rPr>
-              <a:t>Yerel öncelikli sağlayıcılar, maskeleme ve bütçe denetimi; öneri üretir, karar vermez</a:t>
+              <a:t>13 hazır rapor · PDF, Excel ve CSV dışa aktarım</a:t>
             </a:r>
           </a:p>
         </p:txBody>
@@ -38249,7 +38476,7 @@
                 </a:solidFill>
                 <a:latin typeface="DejaVu Sans"/>
               </a:rPr>
-              <a:t>Eğitim merkezi</a:t>
+              <a:t>Yapay zekâ asistanı</a:t>
             </a:r>
           </a:p>
         </p:txBody>
@@ -38348,7 +38575,7 @@
       </p:sp>
       <p:pic>
         <p:nvPicPr>
-          <p:cNvPr id="5" name="Picture 4" descr="egitim.png"/>
+          <p:cNvPr id="5" name="Picture 4" descr="yapay-zeka.png"/>
           <p:cNvPicPr>
             <a:picLocks noChangeAspect="1"/>
           </p:cNvPicPr>
@@ -38404,7 +38631,7 @@
                 </a:solidFill>
                 <a:latin typeface="DejaVu Sans"/>
               </a:rPr>
-              <a:t>Rol bazlı modül ve ders yapısıyla personel eğitimi</a:t>
+              <a:t>Yerel öncelikli sağlayıcılar, maskeleme ve bütçe denetimi; öneri üretir, karar vermez</a:t>
             </a:r>
           </a:p>
         </p:txBody>
@@ -38515,14 +38742,53 @@
       <p:grpSpPr/>
       <p:sp>
         <p:nvSpPr>
-          <p:cNvPr id="2" name="Rectangle 1"/>
+          <p:cNvPr id="2" name="TextBox 1"/>
+          <p:cNvSpPr txBox="1"/>
+          <p:nvPr/>
+        </p:nvSpPr>
+        <p:spPr>
+          <a:xfrm>
+            <a:off x="777240" y="566928"/>
+            <a:ext cx="10607040" cy="914400"/>
+          </a:xfrm>
+          <a:prstGeom prst="rect">
+            <a:avLst/>
+          </a:prstGeom>
+          <a:noFill/>
+        </p:spPr>
+        <p:txBody>
+          <a:bodyPr wrap="square" anchor="t" lIns="0" rIns="0" tIns="0" bIns="0">
+            <a:spAutoFit/>
+          </a:bodyPr>
+          <a:lstStyle/>
+          <a:p>
+            <a:pPr algn="l">
+              <a:spcAft>
+                <a:spcPts val="0"/>
+              </a:spcAft>
+            </a:pPr>
+            <a:r>
+              <a:rPr sz="3000" b="1">
+                <a:solidFill>
+                  <a:srgbClr val="F2EAEC"/>
+                </a:solidFill>
+                <a:latin typeface="DejaVu Sans"/>
+              </a:rPr>
+              <a:t>Eğitim merkezi</a:t>
+            </a:r>
+          </a:p>
+        </p:txBody>
+      </p:sp>
+      <p:sp>
+        <p:nvSpPr>
+          <p:cNvPr id="3" name="Rectangle 2"/>
           <p:cNvSpPr/>
           <p:nvPr/>
         </p:nvSpPr>
         <p:spPr>
           <a:xfrm>
-            <a:off x="0" y="0"/>
-            <a:ext cx="256032" cy="6858000"/>
+            <a:off x="777240" y="1572768"/>
+            <a:ext cx="1371600" cy="38100"/>
           </a:xfrm>
           <a:prstGeom prst="rect">
             <a:avLst/>
@@ -38559,6 +38825,265 @@
       </p:sp>
       <p:sp>
         <p:nvSpPr>
+          <p:cNvPr id="4" name="Rounded Rectangle 3"/>
+          <p:cNvSpPr/>
+          <p:nvPr/>
+        </p:nvSpPr>
+        <p:spPr>
+          <a:xfrm>
+            <a:off x="2815437" y="1801368"/>
+            <a:ext cx="6558076" cy="4133087"/>
+          </a:xfrm>
+          <a:prstGeom prst="roundRect">
+            <a:avLst>
+              <a:gd name="adj" fmla="val 6000"/>
+            </a:avLst>
+          </a:prstGeom>
+          <a:solidFill>
+            <a:srgbClr val="241419"/>
+          </a:solidFill>
+          <a:ln w="12700">
+            <a:solidFill>
+              <a:srgbClr val="3D2530"/>
+            </a:solidFill>
+          </a:ln>
+          <a:effectLst/>
+        </p:spPr>
+        <p:style>
+          <a:lnRef idx="1">
+            <a:schemeClr val="accent1"/>
+          </a:lnRef>
+          <a:fillRef idx="3">
+            <a:schemeClr val="accent1"/>
+          </a:fillRef>
+          <a:effectRef idx="2">
+            <a:schemeClr val="accent1"/>
+          </a:effectRef>
+          <a:fontRef idx="minor">
+            <a:schemeClr val="lt1"/>
+          </a:fontRef>
+        </p:style>
+        <p:txBody>
+          <a:bodyPr rtlCol="0" anchor="ctr"/>
+          <a:lstStyle/>
+          <a:p>
+            <a:pPr algn="ctr"/>
+          </a:p>
+        </p:txBody>
+      </p:sp>
+      <p:pic>
+        <p:nvPicPr>
+          <p:cNvPr id="5" name="Picture 4" descr="egitim.png"/>
+          <p:cNvPicPr>
+            <a:picLocks noChangeAspect="1"/>
+          </p:cNvPicPr>
+          <p:nvPr/>
+        </p:nvPicPr>
+        <p:blipFill>
+          <a:blip r:embed="rId2"/>
+          <a:stretch>
+            <a:fillRect/>
+          </a:stretch>
+        </p:blipFill>
+        <p:spPr>
+          <a:xfrm>
+            <a:off x="2861157" y="1847088"/>
+            <a:ext cx="6466636" cy="4041648"/>
+          </a:xfrm>
+          <a:prstGeom prst="rect">
+            <a:avLst/>
+          </a:prstGeom>
+        </p:spPr>
+      </p:pic>
+      <p:sp>
+        <p:nvSpPr>
+          <p:cNvPr id="6" name="TextBox 5"/>
+          <p:cNvSpPr txBox="1"/>
+          <p:nvPr/>
+        </p:nvSpPr>
+        <p:spPr>
+          <a:xfrm>
+            <a:off x="777240" y="6016751"/>
+            <a:ext cx="10607040" cy="457200"/>
+          </a:xfrm>
+          <a:prstGeom prst="rect">
+            <a:avLst/>
+          </a:prstGeom>
+          <a:noFill/>
+        </p:spPr>
+        <p:txBody>
+          <a:bodyPr wrap="square" anchor="t" lIns="0" rIns="0" tIns="0" bIns="0">
+            <a:spAutoFit/>
+          </a:bodyPr>
+          <a:lstStyle/>
+          <a:p>
+            <a:pPr algn="l">
+              <a:spcAft>
+                <a:spcPts val="0"/>
+              </a:spcAft>
+            </a:pPr>
+            <a:r>
+              <a:rPr sz="1150" b="0">
+                <a:solidFill>
+                  <a:srgbClr val="B9A7AE"/>
+                </a:solidFill>
+                <a:latin typeface="DejaVu Sans"/>
+              </a:rPr>
+              <a:t>Rol bazlı modül ve ders yapısıyla personel eğitimi</a:t>
+            </a:r>
+          </a:p>
+        </p:txBody>
+      </p:sp>
+      <p:sp>
+        <p:nvSpPr>
+          <p:cNvPr id="7" name="TextBox 6"/>
+          <p:cNvSpPr txBox="1"/>
+          <p:nvPr/>
+        </p:nvSpPr>
+        <p:spPr>
+          <a:xfrm>
+            <a:off x="777240" y="6327648"/>
+            <a:ext cx="7315200" cy="320040"/>
+          </a:xfrm>
+          <a:prstGeom prst="rect">
+            <a:avLst/>
+          </a:prstGeom>
+          <a:noFill/>
+        </p:spPr>
+        <p:txBody>
+          <a:bodyPr wrap="square" anchor="t" lIns="0" rIns="0" tIns="0" bIns="0">
+            <a:spAutoFit/>
+          </a:bodyPr>
+          <a:lstStyle/>
+          <a:p>
+            <a:pPr algn="l">
+              <a:spcAft>
+                <a:spcPts val="0"/>
+              </a:spcAft>
+            </a:pPr>
+            <a:r>
+              <a:rPr sz="900" b="0">
+                <a:solidFill>
+                  <a:srgbClr val="B9A7AE"/>
+                </a:solidFill>
+                <a:latin typeface="DejaVu Sans"/>
+              </a:rPr>
+              <a:t>Wine House · Aziz Şekerdil · 2026</a:t>
+            </a:r>
+          </a:p>
+        </p:txBody>
+      </p:sp>
+      <p:sp>
+        <p:nvSpPr>
+          <p:cNvPr id="8" name="TextBox 7"/>
+          <p:cNvSpPr txBox="1"/>
+          <p:nvPr/>
+        </p:nvSpPr>
+        <p:spPr>
+          <a:xfrm>
+            <a:off x="10424160" y="6327648"/>
+            <a:ext cx="960120" cy="320040"/>
+          </a:xfrm>
+          <a:prstGeom prst="rect">
+            <a:avLst/>
+          </a:prstGeom>
+          <a:noFill/>
+        </p:spPr>
+        <p:txBody>
+          <a:bodyPr wrap="square" anchor="t" lIns="0" rIns="0" tIns="0" bIns="0">
+            <a:spAutoFit/>
+          </a:bodyPr>
+          <a:lstStyle/>
+          <a:p>
+            <a:pPr algn="r">
+              <a:spcAft>
+                <a:spcPts val="0"/>
+              </a:spcAft>
+            </a:pPr>
+            <a:r>
+              <a:rPr sz="1000" b="0">
+                <a:solidFill>
+                  <a:srgbClr val="B9A7AE"/>
+                </a:solidFill>
+                <a:latin typeface="DejaVu Sans"/>
+              </a:rPr>
+              <a:t>57</a:t>
+            </a:r>
+          </a:p>
+        </p:txBody>
+      </p:sp>
+    </p:spTree>
+  </p:cSld>
+  <p:clrMapOvr>
+    <a:masterClrMapping/>
+  </p:clrMapOvr>
+</p:sld>
+</file>
+
+<file path=ppt/slides/slide58.xml><?xml version="1.0" encoding="utf-8"?>
+<p:sld xmlns:a="http://schemas.openxmlformats.org/drawingml/2006/main" xmlns:p="http://schemas.openxmlformats.org/presentationml/2006/main" xmlns:r="http://schemas.openxmlformats.org/officeDocument/2006/relationships">
+  <p:cSld>
+    <p:bg>
+      <p:bgPr>
+        <a:solidFill>
+          <a:srgbClr val="1A0E14"/>
+        </a:solidFill>
+        <a:effectLst/>
+      </p:bgPr>
+    </p:bg>
+    <p:spTree>
+      <p:nvGrpSpPr>
+        <p:cNvPr id="1" name=""/>
+        <p:cNvGrpSpPr/>
+        <p:nvPr/>
+      </p:nvGrpSpPr>
+      <p:grpSpPr/>
+      <p:sp>
+        <p:nvSpPr>
+          <p:cNvPr id="2" name="Rectangle 1"/>
+          <p:cNvSpPr/>
+          <p:nvPr/>
+        </p:nvSpPr>
+        <p:spPr>
+          <a:xfrm>
+            <a:off x="0" y="0"/>
+            <a:ext cx="256032" cy="6858000"/>
+          </a:xfrm>
+          <a:prstGeom prst="rect">
+            <a:avLst/>
+          </a:prstGeom>
+          <a:solidFill>
+            <a:srgbClr val="C8A45C"/>
+          </a:solidFill>
+          <a:ln>
+            <a:noFill/>
+          </a:ln>
+          <a:effectLst/>
+        </p:spPr>
+        <p:style>
+          <a:lnRef idx="1">
+            <a:schemeClr val="accent1"/>
+          </a:lnRef>
+          <a:fillRef idx="3">
+            <a:schemeClr val="accent1"/>
+          </a:fillRef>
+          <a:effectRef idx="2">
+            <a:schemeClr val="accent1"/>
+          </a:effectRef>
+          <a:fontRef idx="minor">
+            <a:schemeClr val="lt1"/>
+          </a:fontRef>
+        </p:style>
+        <p:txBody>
+          <a:bodyPr rtlCol="0" anchor="ctr"/>
+          <a:lstStyle/>
+          <a:p>
+            <a:pPr algn="ctr"/>
+          </a:p>
+        </p:txBody>
+      </p:sp>
+      <p:sp>
+        <p:nvSpPr>
           <p:cNvPr id="3" name="Rectangle 2"/>
           <p:cNvSpPr/>
           <p:nvPr/>
@@ -38938,7 +39463,7 @@
                 </a:solidFill>
                 <a:latin typeface="DejaVu Sans"/>
               </a:rPr>
-              <a:t>57</a:t>
+              <a:t>58</a:t>
             </a:r>
           </a:p>
         </p:txBody>
@@ -39169,7 +39694,7 @@
                 </a:solidFill>
                 <a:latin typeface="DejaVu Sans"/>
               </a:rPr>
-              <a:t>6 / 57</a:t>
+              <a:t>6 / 58</a:t>
             </a:r>
           </a:p>
         </p:txBody>
